--- a/outputs/produkte/mama-ceo/03-praesentationen/saeule-3/04-lektion-3-4.pptx
+++ b/outputs/produkte/mama-ceo/03-praesentationen/saeule-3/04-lektion-3-4.pptx
@@ -17,9 +17,8 @@
     <p:sldId id="265" r:id="rId17"/>
     <p:sldId id="266" r:id="rId18"/>
     <p:sldId id="267" r:id="rId19"/>
-    <p:sldId id="268" r:id="rId20"/>
   </p:sldIdLst>
-  <p:sldSz cx="12191695" cy="6858000" type="screen4x3"/>
+  <p:sldSz cx="9144000" cy="5143500" type="screen4x3"/>
   <p:notesSz cx="6858000" cy="9144000"/>
   <p:defaultTextStyle>
     <a:defPPr>
@@ -724,77 +723,7 @@
           <a:lstStyle/>
           <a:p>
             <a:r>
-              <a:t>Im Arbeitsblatt baust du jetzt deinen Monatsplan mit Fokus, drei Zielen und den aktiven Bereichen, dann deine Beispiel-Woche mit diesen Bereichen in deinen eigenen Power-Slots, und du hast eine Tagesplaner-Vorlage zum Kopieren. Nimm dir dafür Zeit, das ist das Herzstück.</a:t>
-            </a:r>
-          </a:p>
-        </p:txBody>
-      </p:sp>
-      <p:sp>
-        <p:nvSpPr>
-          <p:cNvPr id="4" name="Slide Number Placeholder 3"/>
-          <p:cNvSpPr>
-            <a:spLocks noGrp="1"/>
-          </p:cNvSpPr>
-          <p:nvPr>
-            <p:ph type="sldNum" idx="5" sz="quarter"/>
-          </p:nvPr>
-        </p:nvSpPr>
-        <p:spPr/>
-      </p:sp>
-    </p:spTree>
-  </p:cSld>
-  <p:clrMapOvr>
-    <a:masterClrMapping/>
-  </p:clrMapOvr>
-</p:notes>
-</file>
-
-<file path=ppt/notesSlides/notesSlide13.xml><?xml version="1.0" encoding="utf-8"?>
-<p:notes xmlns:a="http://schemas.openxmlformats.org/drawingml/2006/main" xmlns:p="http://schemas.openxmlformats.org/presentationml/2006/main" xmlns:r="http://schemas.openxmlformats.org/officeDocument/2006/relationships">
-  <p:cSld>
-    <p:spTree>
-      <p:nvGrpSpPr>
-        <p:cNvPr id="1" name=""/>
-        <p:cNvGrpSpPr/>
-        <p:nvPr/>
-      </p:nvGrpSpPr>
-      <p:grpSpPr>
-        <a:xfrm>
-          <a:off x="0" y="0"/>
-          <a:ext cx="0" cy="0"/>
-          <a:chOff x="0" y="0"/>
-          <a:chExt cx="0" cy="0"/>
-        </a:xfrm>
-      </p:grpSpPr>
-      <p:sp>
-        <p:nvSpPr>
-          <p:cNvPr id="2" name="Slide Image Placeholder 1"/>
-          <p:cNvSpPr>
-            <a:spLocks noGrp="1"/>
-          </p:cNvSpPr>
-          <p:nvPr>
-            <p:ph type="sldImg" idx="2"/>
-          </p:nvPr>
-        </p:nvSpPr>
-        <p:spPr/>
-      </p:sp>
-      <p:sp>
-        <p:nvSpPr>
-          <p:cNvPr id="3" name="Notes Placeholder 2"/>
-          <p:cNvSpPr>
-            <a:spLocks noGrp="1"/>
-          </p:cNvSpPr>
-          <p:nvPr>
-            <p:ph type="body" idx="3" sz="quarter"/>
-          </p:nvPr>
-        </p:nvSpPr>
-        <p:spPr/>
-        <p:txBody>
-          <a:bodyPr/>
-          <a:lstStyle/>
-          <a:p>
-            <a:r>
-              <a:t>In der nächsten Lektion, der MASTERY, bauen wir das alles gemeinsam in Notion. Du duplizierst mein Master-Template und füllst es mit allem was du bis hierher erarbeitet hast. Plan dir dafür eine ungestörte halbe Stunde ein. Bis gleich.</a:t>
+              <a:t>Im Arbeitsblatt baust du jetzt deinen Monatsplan mit Fokus, drei Zielen und den aktiven Bereichen, dann deine Beispiel-Woche in deinen eigenen Power-Slots, und du hast eine Tagesplaner-Vorlage zum Kopieren. In der nächsten Lektion, der MASTERY, bauen wir das alles gemeinsam in Notion. Plan dir dafür eine ungestörte halbe Stunde ein.</a:t>
             </a:r>
           </a:p>
         </p:txBody>
@@ -1214,7 +1143,7 @@
           <a:lstStyle/>
           <a:p>
             <a:r>
-              <a:t>Und jetzt wird es ganz konkret. Der Lebens-Bereich ist die Schublade, aber in die Schublade legst du die einzelne Aufgabe aus deinem Brain Dump in Säule 2. Beispiel: Montag Vormittag ist Produkterstellung, und die konkrete Aufgabe ist Modul zwei aufnehmen. So wie du beim Haushalt sagst Dienstag ist Bad und Mittwoch ist Küche, sagst du jetzt fürs Business: dieser Slot, diese Aufgabe. Damit ist nichts mehr nur ein vager Bereich, sondern ein klarer Auftrag.</a:t>
+              <a:t>Und jetzt wird es ganz konkret. Der Lebens-Bereich ist die Schublade, aber in die Schublade legst du die einzelne Aufgabe aus deinem Brain Dump in Säule 2. Beispiel: Montag Vormittag ist Produkterstellung, und die konkrete Aufgabe ist Modul zwei aufnehmen. So wie du beim Haushalt sagst Dienstag ist Bad und Mittwoch ist Küche, sagst du jetzt fürs Business: dieser Slot, diese Aufgabe.</a:t>
             </a:r>
           </a:p>
         </p:txBody>
@@ -4356,7 +4285,7 @@
     <p:bg>
       <p:bgPr>
         <a:solidFill>
-          <a:srgbClr val="1F6F6B"/>
+          <a:srgbClr val="F1ECDD"/>
         </a:solidFill>
         <a:effectLst/>
       </p:bgPr>
@@ -4370,14 +4299,58 @@
       <p:grpSpPr/>
       <p:sp>
         <p:nvSpPr>
-          <p:cNvPr id="2" name="TextBox 1"/>
+          <p:cNvPr id="2" name="Oval 1"/>
+          <p:cNvSpPr/>
+          <p:nvPr/>
+        </p:nvSpPr>
+        <p:spPr>
+          <a:xfrm>
+            <a:off x="6858000" y="3840480"/>
+            <a:ext cx="3200400" cy="3200400"/>
+          </a:xfrm>
+          <a:prstGeom prst="ellipse">
+            <a:avLst/>
+          </a:prstGeom>
+          <a:solidFill>
+            <a:srgbClr val="DC822E"/>
+          </a:solidFill>
+          <a:ln>
+            <a:noFill/>
+          </a:ln>
+          <a:effectLst/>
+        </p:spPr>
+        <p:style>
+          <a:lnRef idx="1">
+            <a:schemeClr val="accent1"/>
+          </a:lnRef>
+          <a:fillRef idx="3">
+            <a:schemeClr val="accent1"/>
+          </a:fillRef>
+          <a:effectRef idx="2">
+            <a:schemeClr val="accent1"/>
+          </a:effectRef>
+          <a:fontRef idx="minor">
+            <a:schemeClr val="lt1"/>
+          </a:fontRef>
+        </p:style>
+        <p:txBody>
+          <a:bodyPr rtlCol="0" anchor="ctr"/>
+          <a:lstStyle/>
+          <a:p>
+            <a:pPr algn="ctr"/>
+          </a:p>
+        </p:txBody>
+      </p:sp>
+      <p:sp>
+        <p:nvSpPr>
+          <p:cNvPr id="3" name="TextBox 2"/>
           <p:cNvSpPr txBox="1"/>
           <p:nvPr/>
         </p:nvSpPr>
         <p:spPr>
           <a:xfrm>
-            <a:off x="914400" y="1920240"/>
-            <a:ext cx="10332720" cy="914400"/>
+            <a:off x="548640" y="548640"/>
+            <a:ext cx="8046720" cy="365760"/>
           </a:xfrm>
           <a:prstGeom prst="rect">
             <a:avLst/>
@@ -4390,36 +4363,72 @@
           </a:bodyPr>
           <a:lstStyle/>
           <a:p>
-            <a:pPr algn="l">
-              <a:spcBef>
-                <a:spcPts val="0"/>
-              </a:spcBef>
-              <a:spcAft>
-                <a:spcPts val="1000"/>
-              </a:spcAft>
-            </a:pPr>
-            <a:r>
-              <a:rPr sz="8000" b="1" i="0">
-                <a:solidFill>
-                  <a:srgbClr val="F1ECDD"/>
-                </a:solidFill>
-                <a:latin typeface="Georgia"/>
-              </a:rPr>
-              <a:t>3.4</a:t>
-            </a:r>
-          </a:p>
-        </p:txBody>
-      </p:sp>
-      <p:sp>
-        <p:nvSpPr>
-          <p:cNvPr id="3" name="TextBox 2"/>
+            <a:r>
+              <a:rPr sz="1100" b="1" i="0">
+                <a:solidFill>
+                  <a:srgbClr val="DC822E"/>
+                </a:solidFill>
+                <a:latin typeface="Calibri"/>
+              </a:rPr>
+              <a:t>SÄULE 3 — DU BAUST DIE STRUKTUR</a:t>
+            </a:r>
+          </a:p>
+        </p:txBody>
+      </p:sp>
+      <p:sp>
+        <p:nvSpPr>
+          <p:cNvPr id="4" name="Rectangle 3"/>
+          <p:cNvSpPr/>
+          <p:nvPr/>
+        </p:nvSpPr>
+        <p:spPr>
+          <a:xfrm>
+            <a:off x="548640" y="960120"/>
+            <a:ext cx="548640" cy="45720"/>
+          </a:xfrm>
+          <a:prstGeom prst="rect">
+            <a:avLst/>
+          </a:prstGeom>
+          <a:solidFill>
+            <a:srgbClr val="DC822E"/>
+          </a:solidFill>
+          <a:ln>
+            <a:noFill/>
+          </a:ln>
+          <a:effectLst/>
+        </p:spPr>
+        <p:style>
+          <a:lnRef idx="1">
+            <a:schemeClr val="accent1"/>
+          </a:lnRef>
+          <a:fillRef idx="3">
+            <a:schemeClr val="accent1"/>
+          </a:fillRef>
+          <a:effectRef idx="2">
+            <a:schemeClr val="accent1"/>
+          </a:effectRef>
+          <a:fontRef idx="minor">
+            <a:schemeClr val="lt1"/>
+          </a:fontRef>
+        </p:style>
+        <p:txBody>
+          <a:bodyPr rtlCol="0" anchor="ctr"/>
+          <a:lstStyle/>
+          <a:p>
+            <a:pPr algn="ctr"/>
+          </a:p>
+        </p:txBody>
+      </p:sp>
+      <p:sp>
+        <p:nvSpPr>
+          <p:cNvPr id="5" name="TextBox 4"/>
           <p:cNvSpPr txBox="1"/>
           <p:nvPr/>
         </p:nvSpPr>
         <p:spPr>
           <a:xfrm>
-            <a:off x="914400" y="2971800"/>
-            <a:ext cx="10332720" cy="1828800"/>
+            <a:off x="548640" y="1234440"/>
+            <a:ext cx="7863840" cy="1463040"/>
           </a:xfrm>
           <a:prstGeom prst="rect">
             <a:avLst/>
@@ -4432,18 +4441,10 @@
           </a:bodyPr>
           <a:lstStyle/>
           <a:p>
-            <a:pPr algn="l">
-              <a:spcBef>
-                <a:spcPts val="0"/>
-              </a:spcBef>
-              <a:spcAft>
-                <a:spcPts val="1000"/>
-              </a:spcAft>
-            </a:pPr>
             <a:r>
               <a:rPr sz="4400" b="1" i="0">
                 <a:solidFill>
-                  <a:srgbClr val="FFFFFF"/>
+                  <a:srgbClr val="1A3A4A"/>
                 </a:solidFill>
                 <a:latin typeface="Georgia"/>
               </a:rPr>
@@ -4454,14 +4455,14 @@
       </p:sp>
       <p:sp>
         <p:nvSpPr>
-          <p:cNvPr id="4" name="TextBox 3"/>
+          <p:cNvPr id="6" name="TextBox 5"/>
           <p:cNvSpPr txBox="1"/>
           <p:nvPr/>
         </p:nvSpPr>
         <p:spPr>
           <a:xfrm>
-            <a:off x="914400" y="4480560"/>
-            <a:ext cx="10332720" cy="914400"/>
+            <a:off x="548640" y="2880360"/>
+            <a:ext cx="7680960" cy="1280160"/>
           </a:xfrm>
           <a:prstGeom prst="rect">
             <a:avLst/>
@@ -4474,22 +4475,83 @@
           </a:bodyPr>
           <a:lstStyle/>
           <a:p>
-            <a:pPr algn="l">
-              <a:spcBef>
-                <a:spcPts val="0"/>
-              </a:spcBef>
-              <a:spcAft>
-                <a:spcPts val="1000"/>
-              </a:spcAft>
-            </a:pPr>
-            <a:r>
-              <a:rPr sz="2400" b="0" i="1">
-                <a:solidFill>
-                  <a:srgbClr val="F1ECDD"/>
+            <a:r>
+              <a:rPr sz="1800" b="0" i="0">
+                <a:solidFill>
+                  <a:srgbClr val="2C3E50"/>
+                </a:solidFill>
+                <a:latin typeface="Georgia"/>
+              </a:rPr>
+              <a:t>Mit deinen 6 Lebens-Bereichen</a:t>
+            </a:r>
+          </a:p>
+        </p:txBody>
+      </p:sp>
+      <p:sp>
+        <p:nvSpPr>
+          <p:cNvPr id="7" name="TextBox 6"/>
+          <p:cNvSpPr txBox="1"/>
+          <p:nvPr/>
+        </p:nvSpPr>
+        <p:spPr>
+          <a:xfrm>
+            <a:off x="548640" y="4572000"/>
+            <a:ext cx="3657600" cy="365760"/>
+          </a:xfrm>
+          <a:prstGeom prst="rect">
+            <a:avLst/>
+          </a:prstGeom>
+          <a:noFill/>
+        </p:spPr>
+        <p:txBody>
+          <a:bodyPr wrap="square" anchor="t" lIns="0" rIns="0" tIns="0" bIns="0">
+            <a:spAutoFit/>
+          </a:bodyPr>
+          <a:lstStyle/>
+          <a:p>
+            <a:r>
+              <a:rPr sz="1200" b="1" i="0">
+                <a:solidFill>
+                  <a:srgbClr val="12828C"/>
                 </a:solidFill>
                 <a:latin typeface="Calibri"/>
               </a:rPr>
-              <a:t>Mit deinen 6 Lebens-Bereichen</a:t>
+              <a:t>Patricia Ulmann</a:t>
+            </a:r>
+          </a:p>
+        </p:txBody>
+      </p:sp>
+      <p:sp>
+        <p:nvSpPr>
+          <p:cNvPr id="8" name="TextBox 7"/>
+          <p:cNvSpPr txBox="1"/>
+          <p:nvPr/>
+        </p:nvSpPr>
+        <p:spPr>
+          <a:xfrm>
+            <a:off x="4937760" y="4572000"/>
+            <a:ext cx="3657600" cy="365760"/>
+          </a:xfrm>
+          <a:prstGeom prst="rect">
+            <a:avLst/>
+          </a:prstGeom>
+          <a:noFill/>
+        </p:spPr>
+        <p:txBody>
+          <a:bodyPr wrap="square" anchor="t" lIns="0" rIns="0" tIns="0" bIns="0">
+            <a:spAutoFit/>
+          </a:bodyPr>
+          <a:lstStyle/>
+          <a:p>
+            <a:pPr algn="r"/>
+            <a:r>
+              <a:rPr sz="1100" b="0" i="0">
+                <a:solidFill>
+                  <a:srgbClr val="7A8A95"/>
+                </a:solidFill>
+                <a:latin typeface="Calibri"/>
+              </a:rPr>
+              <a:t>mumlifebalance.ch</a:t>
             </a:r>
           </a:p>
         </p:txBody>
@@ -4522,58 +4584,14 @@
       <p:grpSpPr/>
       <p:sp>
         <p:nvSpPr>
-          <p:cNvPr id="2" name="Rectangle 1"/>
-          <p:cNvSpPr/>
-          <p:nvPr/>
-        </p:nvSpPr>
-        <p:spPr>
-          <a:xfrm>
-            <a:off x="548640" y="502920"/>
-            <a:ext cx="201168" cy="201168"/>
-          </a:xfrm>
-          <a:prstGeom prst="rect">
-            <a:avLst/>
-          </a:prstGeom>
-          <a:solidFill>
-            <a:srgbClr val="1F6F6B"/>
-          </a:solidFill>
-          <a:ln>
-            <a:noFill/>
-          </a:ln>
-          <a:effectLst/>
-        </p:spPr>
-        <p:style>
-          <a:lnRef idx="1">
-            <a:schemeClr val="accent1"/>
-          </a:lnRef>
-          <a:fillRef idx="3">
-            <a:schemeClr val="accent1"/>
-          </a:fillRef>
-          <a:effectRef idx="2">
-            <a:schemeClr val="accent1"/>
-          </a:effectRef>
-          <a:fontRef idx="minor">
-            <a:schemeClr val="lt1"/>
-          </a:fontRef>
-        </p:style>
-        <p:txBody>
-          <a:bodyPr rtlCol="0" anchor="ctr"/>
-          <a:lstStyle/>
-          <a:p>
-            <a:pPr algn="ctr"/>
-          </a:p>
-        </p:txBody>
-      </p:sp>
-      <p:sp>
-        <p:nvSpPr>
-          <p:cNvPr id="3" name="TextBox 2"/>
+          <p:cNvPr id="2" name="TextBox 1"/>
           <p:cNvSpPr txBox="1"/>
           <p:nvPr/>
         </p:nvSpPr>
         <p:spPr>
           <a:xfrm>
-            <a:off x="868680" y="457200"/>
-            <a:ext cx="10424160" cy="1005840"/>
+            <a:off x="548640" y="457200"/>
+            <a:ext cx="8046720" cy="914400"/>
           </a:xfrm>
           <a:prstGeom prst="rect">
             <a:avLst/>
@@ -4586,22 +4604,94 @@
           </a:bodyPr>
           <a:lstStyle/>
           <a:p>
-            <a:pPr algn="l">
+            <a:r>
+              <a:rPr sz="3000" b="1" i="0">
+                <a:solidFill>
+                  <a:srgbClr val="1A3A4A"/>
+                </a:solidFill>
+                <a:latin typeface="Georgia"/>
+              </a:rPr>
+              <a:t>Beispiel-Woche</a:t>
+            </a:r>
+          </a:p>
+        </p:txBody>
+      </p:sp>
+      <p:sp>
+        <p:nvSpPr>
+          <p:cNvPr id="3" name="TextBox 2"/>
+          <p:cNvSpPr txBox="1"/>
+          <p:nvPr/>
+        </p:nvSpPr>
+        <p:spPr>
+          <a:xfrm>
+            <a:off x="548640" y="1417320"/>
+            <a:ext cx="8046720" cy="3154680"/>
+          </a:xfrm>
+          <a:prstGeom prst="rect">
+            <a:avLst/>
+          </a:prstGeom>
+          <a:noFill/>
+        </p:spPr>
+        <p:txBody>
+          <a:bodyPr wrap="square" anchor="t" lIns="0" rIns="0" tIns="0" bIns="0">
+            <a:spAutoFit/>
+          </a:bodyPr>
+          <a:lstStyle/>
+          <a:p>
+            <a:pPr>
               <a:spcBef>
                 <a:spcPts val="0"/>
               </a:spcBef>
               <a:spcAft>
-                <a:spcPts val="1000"/>
+                <a:spcPts val="900"/>
               </a:spcAft>
             </a:pPr>
             <a:r>
-              <a:rPr sz="3200" b="1" i="0">
-                <a:solidFill>
-                  <a:srgbClr val="1F6F6B"/>
-                </a:solidFill>
-                <a:latin typeface="Georgia"/>
-              </a:rPr>
-              <a:t>Beispiel-Woche</a:t>
+              <a:rPr sz="1600" b="0" i="0">
+                <a:solidFill>
+                  <a:srgbClr val="2C3E50"/>
+                </a:solidFill>
+                <a:latin typeface="Calibri"/>
+              </a:rPr>
+              <a:t>Power-Slots mit ihren Bereichen + gelbe Mama-Slots + Sonntag-Reset</a:t>
+            </a:r>
+          </a:p>
+          <a:p>
+            <a:pPr>
+              <a:spcBef>
+                <a:spcPts val="0"/>
+              </a:spcBef>
+              <a:spcAft>
+                <a:spcPts val="900"/>
+              </a:spcAft>
+            </a:pPr>
+            <a:r>
+              <a:rPr sz="1600" b="0" i="0">
+                <a:solidFill>
+                  <a:srgbClr val="2C3E50"/>
+                </a:solidFill>
+                <a:latin typeface="Calibri"/>
+              </a:rPr>
+              <a:t>Nur ein Beispiel — deine Woche hat vielleicht weniger Slots oder andere Tage.</a:t>
+            </a:r>
+          </a:p>
+          <a:p>
+            <a:pPr>
+              <a:spcBef>
+                <a:spcPts val="0"/>
+              </a:spcBef>
+              <a:spcAft>
+                <a:spcPts val="800"/>
+              </a:spcAft>
+            </a:pPr>
+            <a:r>
+              <a:rPr sz="1400" b="0" i="1">
+                <a:solidFill>
+                  <a:srgbClr val="7A8A95"/>
+                </a:solidFill>
+                <a:latin typeface="Calibri"/>
+              </a:rPr>
+              <a:t>Wichtig: ausgewogen, statt dass ein Bereich alles auffrisst.</a:t>
             </a:r>
           </a:p>
         </p:txBody>
@@ -4614,8 +4704,8 @@
         </p:nvSpPr>
         <p:spPr>
           <a:xfrm>
-            <a:off x="868680" y="1783080"/>
-            <a:ext cx="10424160" cy="4572000"/>
+            <a:off x="457200" y="4754880"/>
+            <a:ext cx="5486400" cy="274320"/>
           </a:xfrm>
           <a:prstGeom prst="rect">
             <a:avLst/>
@@ -4628,60 +4718,49 @@
           </a:bodyPr>
           <a:lstStyle/>
           <a:p>
-            <a:pPr algn="l">
-              <a:spcBef>
-                <a:spcPts val="0"/>
-              </a:spcBef>
-              <a:spcAft>
-                <a:spcPts val="1400"/>
-              </a:spcAft>
-            </a:pPr>
-            <a:r>
-              <a:rPr sz="2100" b="0" i="0">
-                <a:solidFill>
-                  <a:srgbClr val="2A2A2A"/>
+            <a:r>
+              <a:rPr sz="900" b="0" i="0">
+                <a:solidFill>
+                  <a:srgbClr val="7A8A95"/>
                 </a:solidFill>
                 <a:latin typeface="Calibri"/>
               </a:rPr>
-              <a:t>Power-Slots mit ihren Bereichen + gelbe Mama-Slots + Sonntag-Reset</a:t>
-            </a:r>
-          </a:p>
-          <a:p>
-            <a:pPr algn="l">
-              <a:spcBef>
-                <a:spcPts val="0"/>
-              </a:spcBef>
-              <a:spcAft>
-                <a:spcPts val="1400"/>
-              </a:spcAft>
-            </a:pPr>
-            <a:r>
-              <a:rPr sz="2100" b="0" i="0">
-                <a:solidFill>
-                  <a:srgbClr val="2A2A2A"/>
+              <a:t>Mama-CEO · Säule 3 · Lektion 3.4</a:t>
+            </a:r>
+          </a:p>
+        </p:txBody>
+      </p:sp>
+      <p:sp>
+        <p:nvSpPr>
+          <p:cNvPr id="5" name="TextBox 4"/>
+          <p:cNvSpPr txBox="1"/>
+          <p:nvPr/>
+        </p:nvSpPr>
+        <p:spPr>
+          <a:xfrm>
+            <a:off x="6400800" y="4754880"/>
+            <a:ext cx="2286000" cy="274320"/>
+          </a:xfrm>
+          <a:prstGeom prst="rect">
+            <a:avLst/>
+          </a:prstGeom>
+          <a:noFill/>
+        </p:spPr>
+        <p:txBody>
+          <a:bodyPr wrap="square" anchor="t" lIns="0" rIns="0" tIns="0" bIns="0">
+            <a:spAutoFit/>
+          </a:bodyPr>
+          <a:lstStyle/>
+          <a:p>
+            <a:pPr algn="r"/>
+            <a:r>
+              <a:rPr sz="900" b="0" i="0">
+                <a:solidFill>
+                  <a:srgbClr val="7A8A95"/>
                 </a:solidFill>
                 <a:latin typeface="Calibri"/>
               </a:rPr>
-              <a:t>Nur ein Beispiel — deine Woche hat vielleicht weniger Slots oder andere Tage.</a:t>
-            </a:r>
-          </a:p>
-          <a:p>
-            <a:pPr algn="l">
-              <a:spcBef>
-                <a:spcPts val="0"/>
-              </a:spcBef>
-              <a:spcAft>
-                <a:spcPts val="1400"/>
-              </a:spcAft>
-            </a:pPr>
-            <a:r>
-              <a:rPr sz="2000" b="0" i="1">
-                <a:solidFill>
-                  <a:srgbClr val="6E6E6E"/>
-                </a:solidFill>
-                <a:latin typeface="Calibri"/>
-              </a:rPr>
-              <a:t>Wichtig: ausgewogen, statt dass ein Bereich alles auffrisst.</a:t>
+              <a:t>Mum Life Balance</a:t>
             </a:r>
           </a:p>
         </p:txBody>
@@ -4714,58 +4793,14 @@
       <p:grpSpPr/>
       <p:sp>
         <p:nvSpPr>
-          <p:cNvPr id="2" name="Rectangle 1"/>
-          <p:cNvSpPr/>
-          <p:nvPr/>
-        </p:nvSpPr>
-        <p:spPr>
-          <a:xfrm>
-            <a:off x="548640" y="502920"/>
-            <a:ext cx="201168" cy="201168"/>
-          </a:xfrm>
-          <a:prstGeom prst="rect">
-            <a:avLst/>
-          </a:prstGeom>
-          <a:solidFill>
-            <a:srgbClr val="1F6F6B"/>
-          </a:solidFill>
-          <a:ln>
-            <a:noFill/>
-          </a:ln>
-          <a:effectLst/>
-        </p:spPr>
-        <p:style>
-          <a:lnRef idx="1">
-            <a:schemeClr val="accent1"/>
-          </a:lnRef>
-          <a:fillRef idx="3">
-            <a:schemeClr val="accent1"/>
-          </a:fillRef>
-          <a:effectRef idx="2">
-            <a:schemeClr val="accent1"/>
-          </a:effectRef>
-          <a:fontRef idx="minor">
-            <a:schemeClr val="lt1"/>
-          </a:fontRef>
-        </p:style>
-        <p:txBody>
-          <a:bodyPr rtlCol="0" anchor="ctr"/>
-          <a:lstStyle/>
-          <a:p>
-            <a:pPr algn="ctr"/>
-          </a:p>
-        </p:txBody>
-      </p:sp>
-      <p:sp>
-        <p:nvSpPr>
-          <p:cNvPr id="3" name="TextBox 2"/>
+          <p:cNvPr id="2" name="TextBox 1"/>
           <p:cNvSpPr txBox="1"/>
           <p:nvPr/>
         </p:nvSpPr>
         <p:spPr>
           <a:xfrm>
-            <a:off x="868680" y="457200"/>
-            <a:ext cx="10424160" cy="1005840"/>
+            <a:off x="548640" y="457200"/>
+            <a:ext cx="8046720" cy="914400"/>
           </a:xfrm>
           <a:prstGeom prst="rect">
             <a:avLst/>
@@ -4778,7 +4813,41 @@
           </a:bodyPr>
           <a:lstStyle/>
           <a:p>
-            <a:pPr algn="l">
+            <a:r>
+              <a:rPr sz="3000" b="1" i="0">
+                <a:solidFill>
+                  <a:srgbClr val="1A3A4A"/>
+                </a:solidFill>
+                <a:latin typeface="Georgia"/>
+              </a:rPr>
+              <a:t>Der Tag in 30 Sekunden</a:t>
+            </a:r>
+          </a:p>
+        </p:txBody>
+      </p:sp>
+      <p:sp>
+        <p:nvSpPr>
+          <p:cNvPr id="3" name="TextBox 2"/>
+          <p:cNvSpPr txBox="1"/>
+          <p:nvPr/>
+        </p:nvSpPr>
+        <p:spPr>
+          <a:xfrm>
+            <a:off x="548640" y="1417320"/>
+            <a:ext cx="8046720" cy="3154680"/>
+          </a:xfrm>
+          <a:prstGeom prst="rect">
+            <a:avLst/>
+          </a:prstGeom>
+          <a:noFill/>
+        </p:spPr>
+        <p:txBody>
+          <a:bodyPr wrap="square" anchor="t" lIns="0" rIns="0" tIns="0" bIns="0">
+            <a:spAutoFit/>
+          </a:bodyPr>
+          <a:lstStyle/>
+          <a:p>
+            <a:pPr>
               <a:spcBef>
                 <a:spcPts val="0"/>
               </a:spcBef>
@@ -4787,13 +4856,51 @@
               </a:spcAft>
             </a:pPr>
             <a:r>
-              <a:rPr sz="3200" b="1" i="0">
-                <a:solidFill>
-                  <a:srgbClr val="1F6F6B"/>
+              <a:rPr sz="2100" b="1" i="0">
+                <a:solidFill>
+                  <a:srgbClr val="1A3A4A"/>
                 </a:solidFill>
                 <a:latin typeface="Georgia"/>
               </a:rPr>
-              <a:t>Der Tag in 30 Sekunden</a:t>
+              <a:t>Tagesfokus + 3 Hauptaufgaben</a:t>
+            </a:r>
+          </a:p>
+          <a:p>
+            <a:pPr>
+              <a:spcBef>
+                <a:spcPts val="0"/>
+              </a:spcBef>
+              <a:spcAft>
+                <a:spcPts val="900"/>
+              </a:spcAft>
+            </a:pPr>
+            <a:r>
+              <a:rPr sz="1600" b="0" i="0">
+                <a:solidFill>
+                  <a:srgbClr val="2C3E50"/>
+                </a:solidFill>
+                <a:latin typeface="Calibri"/>
+              </a:rPr>
+              <a:t>Abends: 1-2 Sätze Reflexion.</a:t>
+            </a:r>
+          </a:p>
+          <a:p>
+            <a:pPr>
+              <a:spcBef>
+                <a:spcPts val="0"/>
+              </a:spcBef>
+              <a:spcAft>
+                <a:spcPts val="800"/>
+              </a:spcAft>
+            </a:pPr>
+            <a:r>
+              <a:rPr sz="1400" b="0" i="1">
+                <a:solidFill>
+                  <a:srgbClr val="7A8A95"/>
+                </a:solidFill>
+                <a:latin typeface="Calibri"/>
+              </a:rPr>
+              <a:t>Kein Grübeln — die Woche steht ja schon.</a:t>
             </a:r>
           </a:p>
         </p:txBody>
@@ -4806,8 +4913,8 @@
         </p:nvSpPr>
         <p:spPr>
           <a:xfrm>
-            <a:off x="868680" y="1783080"/>
-            <a:ext cx="10424160" cy="4572000"/>
+            <a:off x="457200" y="4754880"/>
+            <a:ext cx="5486400" cy="274320"/>
           </a:xfrm>
           <a:prstGeom prst="rect">
             <a:avLst/>
@@ -4820,60 +4927,49 @@
           </a:bodyPr>
           <a:lstStyle/>
           <a:p>
-            <a:pPr algn="l">
-              <a:spcBef>
-                <a:spcPts val="0"/>
-              </a:spcBef>
-              <a:spcAft>
-                <a:spcPts val="1400"/>
-              </a:spcAft>
-            </a:pPr>
-            <a:r>
-              <a:rPr sz="2600" b="1" i="0">
-                <a:solidFill>
-                  <a:srgbClr val="2A2A2A"/>
-                </a:solidFill>
-                <a:latin typeface="Georgia"/>
-              </a:rPr>
-              <a:t>Tagesfokus + 3 Hauptaufgaben</a:t>
-            </a:r>
-          </a:p>
-          <a:p>
-            <a:pPr algn="l">
-              <a:spcBef>
-                <a:spcPts val="0"/>
-              </a:spcBef>
-              <a:spcAft>
-                <a:spcPts val="1400"/>
-              </a:spcAft>
-            </a:pPr>
-            <a:r>
-              <a:rPr sz="2100" b="0" i="0">
-                <a:solidFill>
-                  <a:srgbClr val="2A2A2A"/>
+            <a:r>
+              <a:rPr sz="900" b="0" i="0">
+                <a:solidFill>
+                  <a:srgbClr val="7A8A95"/>
                 </a:solidFill>
                 <a:latin typeface="Calibri"/>
               </a:rPr>
-              <a:t>Abends: 1-2 Sätze Reflexion</a:t>
-            </a:r>
-          </a:p>
-          <a:p>
-            <a:pPr algn="l">
-              <a:spcBef>
-                <a:spcPts val="0"/>
-              </a:spcBef>
-              <a:spcAft>
-                <a:spcPts val="1400"/>
-              </a:spcAft>
-            </a:pPr>
-            <a:r>
-              <a:rPr sz="2000" b="0" i="1">
-                <a:solidFill>
-                  <a:srgbClr val="6E6E6E"/>
+              <a:t>Mama-CEO · Säule 3 · Lektion 3.4</a:t>
+            </a:r>
+          </a:p>
+        </p:txBody>
+      </p:sp>
+      <p:sp>
+        <p:nvSpPr>
+          <p:cNvPr id="5" name="TextBox 4"/>
+          <p:cNvSpPr txBox="1"/>
+          <p:nvPr/>
+        </p:nvSpPr>
+        <p:spPr>
+          <a:xfrm>
+            <a:off x="6400800" y="4754880"/>
+            <a:ext cx="2286000" cy="274320"/>
+          </a:xfrm>
+          <a:prstGeom prst="rect">
+            <a:avLst/>
+          </a:prstGeom>
+          <a:noFill/>
+        </p:spPr>
+        <p:txBody>
+          <a:bodyPr wrap="square" anchor="t" lIns="0" rIns="0" tIns="0" bIns="0">
+            <a:spAutoFit/>
+          </a:bodyPr>
+          <a:lstStyle/>
+          <a:p>
+            <a:pPr algn="r"/>
+            <a:r>
+              <a:rPr sz="900" b="0" i="0">
+                <a:solidFill>
+                  <a:srgbClr val="7A8A95"/>
                 </a:solidFill>
                 <a:latin typeface="Calibri"/>
               </a:rPr>
-              <a:t>Kein Grübeln — die Woche steht ja schon.</a:t>
+              <a:t>Mum Life Balance</a:t>
             </a:r>
           </a:p>
         </p:txBody>
@@ -4906,20 +5002,54 @@
       <p:grpSpPr/>
       <p:sp>
         <p:nvSpPr>
-          <p:cNvPr id="2" name="Rectangle 1"/>
+          <p:cNvPr id="2" name="TextBox 1"/>
+          <p:cNvSpPr txBox="1"/>
+          <p:nvPr/>
+        </p:nvSpPr>
+        <p:spPr>
+          <a:xfrm>
+            <a:off x="548640" y="457200"/>
+            <a:ext cx="8046720" cy="822960"/>
+          </a:xfrm>
+          <a:prstGeom prst="rect">
+            <a:avLst/>
+          </a:prstGeom>
+          <a:noFill/>
+        </p:spPr>
+        <p:txBody>
+          <a:bodyPr wrap="square" anchor="t" lIns="0" rIns="0" tIns="0" bIns="0">
+            <a:spAutoFit/>
+          </a:bodyPr>
+          <a:lstStyle/>
+          <a:p>
+            <a:r>
+              <a:rPr sz="3000" b="1" i="0">
+                <a:solidFill>
+                  <a:srgbClr val="1A3A4A"/>
+                </a:solidFill>
+                <a:latin typeface="Georgia"/>
+              </a:rPr>
+              <a:t>Dein nächster Schritt</a:t>
+            </a:r>
+          </a:p>
+        </p:txBody>
+      </p:sp>
+      <p:sp>
+        <p:nvSpPr>
+          <p:cNvPr id="3" name="Rectangle 2"/>
           <p:cNvSpPr/>
           <p:nvPr/>
         </p:nvSpPr>
         <p:spPr>
           <a:xfrm>
-            <a:off x="548640" y="502920"/>
-            <a:ext cx="201168" cy="201168"/>
+            <a:off x="548640" y="1737360"/>
+            <a:ext cx="3931920" cy="2743200"/>
           </a:xfrm>
           <a:prstGeom prst="rect">
             <a:avLst/>
           </a:prstGeom>
           <a:solidFill>
-            <a:srgbClr val="1F6F6B"/>
+            <a:srgbClr val="F1ECDD"/>
           </a:solidFill>
           <a:ln>
             <a:noFill/>
@@ -4950,14 +5080,58 @@
       </p:sp>
       <p:sp>
         <p:nvSpPr>
-          <p:cNvPr id="3" name="TextBox 2"/>
+          <p:cNvPr id="4" name="Rectangle 3"/>
+          <p:cNvSpPr/>
+          <p:nvPr/>
+        </p:nvSpPr>
+        <p:spPr>
+          <a:xfrm>
+            <a:off x="548640" y="1737360"/>
+            <a:ext cx="3931920" cy="91440"/>
+          </a:xfrm>
+          <a:prstGeom prst="rect">
+            <a:avLst/>
+          </a:prstGeom>
+          <a:solidFill>
+            <a:srgbClr val="12828C"/>
+          </a:solidFill>
+          <a:ln>
+            <a:noFill/>
+          </a:ln>
+          <a:effectLst/>
+        </p:spPr>
+        <p:style>
+          <a:lnRef idx="1">
+            <a:schemeClr val="accent1"/>
+          </a:lnRef>
+          <a:fillRef idx="3">
+            <a:schemeClr val="accent1"/>
+          </a:fillRef>
+          <a:effectRef idx="2">
+            <a:schemeClr val="accent1"/>
+          </a:effectRef>
+          <a:fontRef idx="minor">
+            <a:schemeClr val="lt1"/>
+          </a:fontRef>
+        </p:style>
+        <p:txBody>
+          <a:bodyPr rtlCol="0" anchor="ctr"/>
+          <a:lstStyle/>
+          <a:p>
+            <a:pPr algn="ctr"/>
+          </a:p>
+        </p:txBody>
+      </p:sp>
+      <p:sp>
+        <p:nvSpPr>
+          <p:cNvPr id="5" name="TextBox 4"/>
           <p:cNvSpPr txBox="1"/>
           <p:nvPr/>
         </p:nvSpPr>
         <p:spPr>
           <a:xfrm>
-            <a:off x="868680" y="457200"/>
-            <a:ext cx="10424160" cy="1005840"/>
+            <a:off x="731520" y="1920240"/>
+            <a:ext cx="3657600" cy="274320"/>
           </a:xfrm>
           <a:prstGeom prst="rect">
             <a:avLst/>
@@ -4970,36 +5144,28 @@
           </a:bodyPr>
           <a:lstStyle/>
           <a:p>
-            <a:pPr algn="l">
-              <a:spcBef>
-                <a:spcPts val="0"/>
-              </a:spcBef>
-              <a:spcAft>
-                <a:spcPts val="1000"/>
-              </a:spcAft>
-            </a:pPr>
-            <a:r>
-              <a:rPr sz="3200" b="1" i="0">
-                <a:solidFill>
-                  <a:srgbClr val="1F6F6B"/>
-                </a:solidFill>
-                <a:latin typeface="Georgia"/>
-              </a:rPr>
-              <a:t>📋 Im Arbeitsblatt</a:t>
-            </a:r>
-          </a:p>
-        </p:txBody>
-      </p:sp>
-      <p:sp>
-        <p:nvSpPr>
-          <p:cNvPr id="4" name="TextBox 3"/>
+            <a:r>
+              <a:rPr sz="1000" b="1" i="0">
+                <a:solidFill>
+                  <a:srgbClr val="0D6168"/>
+                </a:solidFill>
+                <a:latin typeface="Calibri"/>
+              </a:rPr>
+              <a:t>📋  ARBEITSBLATT</a:t>
+            </a:r>
+          </a:p>
+        </p:txBody>
+      </p:sp>
+      <p:sp>
+        <p:nvSpPr>
+          <p:cNvPr id="6" name="TextBox 5"/>
           <p:cNvSpPr txBox="1"/>
           <p:nvPr/>
         </p:nvSpPr>
         <p:spPr>
           <a:xfrm>
-            <a:off x="868680" y="1783080"/>
-            <a:ext cx="10424160" cy="4572000"/>
+            <a:off x="731520" y="2286000"/>
+            <a:ext cx="3657600" cy="548640"/>
           </a:xfrm>
           <a:prstGeom prst="rect">
             <a:avLst/>
@@ -5012,119 +5178,28 @@
           </a:bodyPr>
           <a:lstStyle/>
           <a:p>
-            <a:pPr algn="l">
-              <a:spcBef>
-                <a:spcPts val="0"/>
-              </a:spcBef>
-              <a:spcAft>
-                <a:spcPts val="1400"/>
-              </a:spcAft>
-            </a:pPr>
-            <a:r>
-              <a:rPr sz="2100" b="0" i="0">
-                <a:solidFill>
-                  <a:srgbClr val="2A2A2A"/>
-                </a:solidFill>
-                <a:latin typeface="Calibri"/>
-              </a:rPr>
-              <a:t>Dein Monatsplan (Fokus + 3 Ziele + aktive Bereiche)</a:t>
-            </a:r>
-          </a:p>
-          <a:p>
-            <a:pPr algn="l">
-              <a:spcBef>
-                <a:spcPts val="0"/>
-              </a:spcBef>
-              <a:spcAft>
-                <a:spcPts val="1400"/>
-              </a:spcAft>
-            </a:pPr>
-            <a:r>
-              <a:rPr sz="2100" b="0" i="0">
-                <a:solidFill>
-                  <a:srgbClr val="2A2A2A"/>
-                </a:solidFill>
-                <a:latin typeface="Calibri"/>
-              </a:rPr>
-              <a:t>Deine Beispiel-Woche in deinen eigenen Slots</a:t>
-            </a:r>
-          </a:p>
-          <a:p>
-            <a:pPr algn="l">
-              <a:spcBef>
-                <a:spcPts val="0"/>
-              </a:spcBef>
-              <a:spcAft>
-                <a:spcPts val="1400"/>
-              </a:spcAft>
-            </a:pPr>
-            <a:r>
-              <a:rPr sz="2100" b="0" i="0">
-                <a:solidFill>
-                  <a:srgbClr val="2A2A2A"/>
-                </a:solidFill>
-                <a:latin typeface="Calibri"/>
-              </a:rPr>
-              <a:t>Eine Tagesplaner-Vorlage zum Kopieren</a:t>
-            </a:r>
-          </a:p>
-          <a:p>
-            <a:pPr algn="l">
-              <a:spcBef>
-                <a:spcPts val="0"/>
-              </a:spcBef>
-              <a:spcAft>
-                <a:spcPts val="1400"/>
-              </a:spcAft>
-            </a:pPr>
-            <a:r>
-              <a:rPr sz="2000" b="0" i="1">
-                <a:solidFill>
-                  <a:srgbClr val="6E6E6E"/>
-                </a:solidFill>
-                <a:latin typeface="Calibri"/>
-              </a:rPr>
-              <a:t>Nimm dir dafür Zeit — das ist das Herzstück.</a:t>
-            </a:r>
-          </a:p>
-        </p:txBody>
-      </p:sp>
-    </p:spTree>
-  </p:cSld>
-  <p:clrMapOvr>
-    <a:masterClrMapping/>
-  </p:clrMapOvr>
-</p:sld>
-</file>
-
-<file path=ppt/slides/slide13.xml><?xml version="1.0" encoding="utf-8"?>
-<p:sld xmlns:a="http://schemas.openxmlformats.org/drawingml/2006/main" xmlns:p="http://schemas.openxmlformats.org/presentationml/2006/main" xmlns:r="http://schemas.openxmlformats.org/officeDocument/2006/relationships">
-  <p:cSld>
-    <p:bg>
-      <p:bgPr>
-        <a:solidFill>
-          <a:srgbClr val="1F6F6B"/>
-        </a:solidFill>
-        <a:effectLst/>
-      </p:bgPr>
-    </p:bg>
-    <p:spTree>
-      <p:nvGrpSpPr>
-        <p:cNvPr id="1" name=""/>
-        <p:cNvGrpSpPr/>
-        <p:nvPr/>
-      </p:nvGrpSpPr>
-      <p:grpSpPr/>
-      <p:sp>
-        <p:nvSpPr>
-          <p:cNvPr id="2" name="TextBox 1"/>
+            <a:r>
+              <a:rPr sz="1600" b="1" i="0">
+                <a:solidFill>
+                  <a:srgbClr val="1A3A4A"/>
+                </a:solidFill>
+                <a:latin typeface="Georgia"/>
+              </a:rPr>
+              <a:t>Monat + Woche bauen</a:t>
+            </a:r>
+          </a:p>
+        </p:txBody>
+      </p:sp>
+      <p:sp>
+        <p:nvSpPr>
+          <p:cNvPr id="7" name="TextBox 6"/>
           <p:cNvSpPr txBox="1"/>
           <p:nvPr/>
         </p:nvSpPr>
         <p:spPr>
           <a:xfrm>
-            <a:off x="1005840" y="2194560"/>
-            <a:ext cx="10149840" cy="2743200"/>
+            <a:off x="731520" y="2880360"/>
+            <a:ext cx="3566160" cy="1463040"/>
           </a:xfrm>
           <a:prstGeom prst="rect">
             <a:avLst/>
@@ -5132,65 +5207,278 @@
           <a:noFill/>
         </p:spPr>
         <p:txBody>
-          <a:bodyPr wrap="square" anchor="ctr" lIns="0" rIns="0" tIns="0" bIns="0">
+          <a:bodyPr wrap="square" anchor="t" lIns="0" rIns="0" tIns="0" bIns="0">
             <a:spAutoFit/>
           </a:bodyPr>
           <a:lstStyle/>
           <a:p>
-            <a:pPr algn="l">
-              <a:spcBef>
-                <a:spcPts val="0"/>
-              </a:spcBef>
-              <a:spcAft>
-                <a:spcPts val="1800"/>
-              </a:spcAft>
-            </a:pPr>
-            <a:r>
-              <a:rPr sz="3200" b="1" i="0">
-                <a:solidFill>
-                  <a:srgbClr val="FFFFFF"/>
+            <a:r>
+              <a:rPr sz="1250" b="0" i="0">
+                <a:solidFill>
+                  <a:srgbClr val="2C3E50"/>
+                </a:solidFill>
+                <a:latin typeface="Calibri"/>
+              </a:rPr>
+              <a:t>Monatsplan (Fokus + 3 Ziele + aktive Bereiche) + Beispiel-Woche in deinen Slots + Tagesplaner-Vorlage. Das ist das Herzstück.</a:t>
+            </a:r>
+          </a:p>
+        </p:txBody>
+      </p:sp>
+      <p:sp>
+        <p:nvSpPr>
+          <p:cNvPr id="8" name="Rectangle 7"/>
+          <p:cNvSpPr/>
+          <p:nvPr/>
+        </p:nvSpPr>
+        <p:spPr>
+          <a:xfrm>
+            <a:off x="4663440" y="1737360"/>
+            <a:ext cx="3931920" cy="2743200"/>
+          </a:xfrm>
+          <a:prstGeom prst="rect">
+            <a:avLst/>
+          </a:prstGeom>
+          <a:solidFill>
+            <a:srgbClr val="F1ECDD"/>
+          </a:solidFill>
+          <a:ln>
+            <a:noFill/>
+          </a:ln>
+          <a:effectLst/>
+        </p:spPr>
+        <p:style>
+          <a:lnRef idx="1">
+            <a:schemeClr val="accent1"/>
+          </a:lnRef>
+          <a:fillRef idx="3">
+            <a:schemeClr val="accent1"/>
+          </a:fillRef>
+          <a:effectRef idx="2">
+            <a:schemeClr val="accent1"/>
+          </a:effectRef>
+          <a:fontRef idx="minor">
+            <a:schemeClr val="lt1"/>
+          </a:fontRef>
+        </p:style>
+        <p:txBody>
+          <a:bodyPr rtlCol="0" anchor="ctr"/>
+          <a:lstStyle/>
+          <a:p>
+            <a:pPr algn="ctr"/>
+          </a:p>
+        </p:txBody>
+      </p:sp>
+      <p:sp>
+        <p:nvSpPr>
+          <p:cNvPr id="9" name="Rectangle 8"/>
+          <p:cNvSpPr/>
+          <p:nvPr/>
+        </p:nvSpPr>
+        <p:spPr>
+          <a:xfrm>
+            <a:off x="4663440" y="1737360"/>
+            <a:ext cx="3931920" cy="91440"/>
+          </a:xfrm>
+          <a:prstGeom prst="rect">
+            <a:avLst/>
+          </a:prstGeom>
+          <a:solidFill>
+            <a:srgbClr val="DC822E"/>
+          </a:solidFill>
+          <a:ln>
+            <a:noFill/>
+          </a:ln>
+          <a:effectLst/>
+        </p:spPr>
+        <p:style>
+          <a:lnRef idx="1">
+            <a:schemeClr val="accent1"/>
+          </a:lnRef>
+          <a:fillRef idx="3">
+            <a:schemeClr val="accent1"/>
+          </a:fillRef>
+          <a:effectRef idx="2">
+            <a:schemeClr val="accent1"/>
+          </a:effectRef>
+          <a:fontRef idx="minor">
+            <a:schemeClr val="lt1"/>
+          </a:fontRef>
+        </p:style>
+        <p:txBody>
+          <a:bodyPr rtlCol="0" anchor="ctr"/>
+          <a:lstStyle/>
+          <a:p>
+            <a:pPr algn="ctr"/>
+          </a:p>
+        </p:txBody>
+      </p:sp>
+      <p:sp>
+        <p:nvSpPr>
+          <p:cNvPr id="10" name="TextBox 9"/>
+          <p:cNvSpPr txBox="1"/>
+          <p:nvPr/>
+        </p:nvSpPr>
+        <p:spPr>
+          <a:xfrm>
+            <a:off x="4846320" y="1920240"/>
+            <a:ext cx="3657600" cy="274320"/>
+          </a:xfrm>
+          <a:prstGeom prst="rect">
+            <a:avLst/>
+          </a:prstGeom>
+          <a:noFill/>
+        </p:spPr>
+        <p:txBody>
+          <a:bodyPr wrap="square" anchor="t" lIns="0" rIns="0" tIns="0" bIns="0">
+            <a:spAutoFit/>
+          </a:bodyPr>
+          <a:lstStyle/>
+          <a:p>
+            <a:r>
+              <a:rPr sz="1000" b="1" i="0">
+                <a:solidFill>
+                  <a:srgbClr val="DC822E"/>
+                </a:solidFill>
+                <a:latin typeface="Calibri"/>
+              </a:rPr>
+              <a:t>▶  ALS NÄCHSTES</a:t>
+            </a:r>
+          </a:p>
+        </p:txBody>
+      </p:sp>
+      <p:sp>
+        <p:nvSpPr>
+          <p:cNvPr id="11" name="TextBox 10"/>
+          <p:cNvSpPr txBox="1"/>
+          <p:nvPr/>
+        </p:nvSpPr>
+        <p:spPr>
+          <a:xfrm>
+            <a:off x="4846320" y="2286000"/>
+            <a:ext cx="3657600" cy="548640"/>
+          </a:xfrm>
+          <a:prstGeom prst="rect">
+            <a:avLst/>
+          </a:prstGeom>
+          <a:noFill/>
+        </p:spPr>
+        <p:txBody>
+          <a:bodyPr wrap="square" anchor="t" lIns="0" rIns="0" tIns="0" bIns="0">
+            <a:spAutoFit/>
+          </a:bodyPr>
+          <a:lstStyle/>
+          <a:p>
+            <a:r>
+              <a:rPr sz="1600" b="1" i="0">
+                <a:solidFill>
+                  <a:srgbClr val="1A3A4A"/>
                 </a:solidFill>
                 <a:latin typeface="Georgia"/>
               </a:rPr>
-              <a:t>Nächste Lektion: 3.5 MASTERY</a:t>
-            </a:r>
-          </a:p>
-          <a:p>
-            <a:pPr algn="l">
-              <a:spcBef>
-                <a:spcPts val="0"/>
-              </a:spcBef>
-              <a:spcAft>
-                <a:spcPts val="1800"/>
-              </a:spcAft>
-            </a:pPr>
-            <a:r>
-              <a:rPr sz="2200" b="0" i="0">
-                <a:solidFill>
-                  <a:srgbClr val="F1ECDD"/>
+              <a:t>Lektion 3.5 (MASTERY)</a:t>
+            </a:r>
+          </a:p>
+        </p:txBody>
+      </p:sp>
+      <p:sp>
+        <p:nvSpPr>
+          <p:cNvPr id="12" name="TextBox 11"/>
+          <p:cNvSpPr txBox="1"/>
+          <p:nvPr/>
+        </p:nvSpPr>
+        <p:spPr>
+          <a:xfrm>
+            <a:off x="4846320" y="2880360"/>
+            <a:ext cx="3566160" cy="1463040"/>
+          </a:xfrm>
+          <a:prstGeom prst="rect">
+            <a:avLst/>
+          </a:prstGeom>
+          <a:noFill/>
+        </p:spPr>
+        <p:txBody>
+          <a:bodyPr wrap="square" anchor="t" lIns="0" rIns="0" tIns="0" bIns="0">
+            <a:spAutoFit/>
+          </a:bodyPr>
+          <a:lstStyle/>
+          <a:p>
+            <a:r>
+              <a:rPr sz="1250" b="0" i="0">
+                <a:solidFill>
+                  <a:srgbClr val="2C3E50"/>
                 </a:solidFill>
                 <a:latin typeface="Calibri"/>
               </a:rPr>
-              <a:t>Dein Notion-Master-Template einrichten</a:t>
-            </a:r>
-          </a:p>
-          <a:p>
-            <a:pPr algn="l">
-              <a:spcBef>
-                <a:spcPts val="0"/>
-              </a:spcBef>
-              <a:spcAft>
-                <a:spcPts val="1800"/>
-              </a:spcAft>
-            </a:pPr>
-            <a:r>
-              <a:rPr sz="2200" b="0" i="0">
-                <a:solidFill>
-                  <a:srgbClr val="F1ECDD"/>
+              <a:t>Jetzt bauen wir das alles gemeinsam in Notion. Plan dir 30 Min ein.</a:t>
+            </a:r>
+          </a:p>
+        </p:txBody>
+      </p:sp>
+      <p:sp>
+        <p:nvSpPr>
+          <p:cNvPr id="13" name="TextBox 12"/>
+          <p:cNvSpPr txBox="1"/>
+          <p:nvPr/>
+        </p:nvSpPr>
+        <p:spPr>
+          <a:xfrm>
+            <a:off x="457200" y="4754880"/>
+            <a:ext cx="5486400" cy="274320"/>
+          </a:xfrm>
+          <a:prstGeom prst="rect">
+            <a:avLst/>
+          </a:prstGeom>
+          <a:noFill/>
+        </p:spPr>
+        <p:txBody>
+          <a:bodyPr wrap="square" anchor="t" lIns="0" rIns="0" tIns="0" bIns="0">
+            <a:spAutoFit/>
+          </a:bodyPr>
+          <a:lstStyle/>
+          <a:p>
+            <a:r>
+              <a:rPr sz="900" b="0" i="0">
+                <a:solidFill>
+                  <a:srgbClr val="7A8A95"/>
                 </a:solidFill>
                 <a:latin typeface="Calibri"/>
               </a:rPr>
-              <a:t>Plan dir dafür eine ungestörte halbe Stunde ein.</a:t>
+              <a:t>Mama-CEO · Säule 3 · Lektion 3.4</a:t>
+            </a:r>
+          </a:p>
+        </p:txBody>
+      </p:sp>
+      <p:sp>
+        <p:nvSpPr>
+          <p:cNvPr id="14" name="TextBox 13"/>
+          <p:cNvSpPr txBox="1"/>
+          <p:nvPr/>
+        </p:nvSpPr>
+        <p:spPr>
+          <a:xfrm>
+            <a:off x="6400800" y="4754880"/>
+            <a:ext cx="2286000" cy="274320"/>
+          </a:xfrm>
+          <a:prstGeom prst="rect">
+            <a:avLst/>
+          </a:prstGeom>
+          <a:noFill/>
+        </p:spPr>
+        <p:txBody>
+          <a:bodyPr wrap="square" anchor="t" lIns="0" rIns="0" tIns="0" bIns="0">
+            <a:spAutoFit/>
+          </a:bodyPr>
+          <a:lstStyle/>
+          <a:p>
+            <a:pPr algn="r"/>
+            <a:r>
+              <a:rPr sz="900" b="0" i="0">
+                <a:solidFill>
+                  <a:srgbClr val="7A8A95"/>
+                </a:solidFill>
+                <a:latin typeface="Calibri"/>
+              </a:rPr>
+              <a:t>Mum Life Balance</a:t>
             </a:r>
           </a:p>
         </p:txBody>
@@ -5223,58 +5511,14 @@
       <p:grpSpPr/>
       <p:sp>
         <p:nvSpPr>
-          <p:cNvPr id="2" name="Rectangle 1"/>
-          <p:cNvSpPr/>
-          <p:nvPr/>
-        </p:nvSpPr>
-        <p:spPr>
-          <a:xfrm>
-            <a:off x="548640" y="502920"/>
-            <a:ext cx="201168" cy="201168"/>
-          </a:xfrm>
-          <a:prstGeom prst="rect">
-            <a:avLst/>
-          </a:prstGeom>
-          <a:solidFill>
-            <a:srgbClr val="1F6F6B"/>
-          </a:solidFill>
-          <a:ln>
-            <a:noFill/>
-          </a:ln>
-          <a:effectLst/>
-        </p:spPr>
-        <p:style>
-          <a:lnRef idx="1">
-            <a:schemeClr val="accent1"/>
-          </a:lnRef>
-          <a:fillRef idx="3">
-            <a:schemeClr val="accent1"/>
-          </a:fillRef>
-          <a:effectRef idx="2">
-            <a:schemeClr val="accent1"/>
-          </a:effectRef>
-          <a:fontRef idx="minor">
-            <a:schemeClr val="lt1"/>
-          </a:fontRef>
-        </p:style>
-        <p:txBody>
-          <a:bodyPr rtlCol="0" anchor="ctr"/>
-          <a:lstStyle/>
-          <a:p>
-            <a:pPr algn="ctr"/>
-          </a:p>
-        </p:txBody>
-      </p:sp>
-      <p:sp>
-        <p:nvSpPr>
-          <p:cNvPr id="3" name="TextBox 2"/>
+          <p:cNvPr id="2" name="TextBox 1"/>
           <p:cNvSpPr txBox="1"/>
           <p:nvPr/>
         </p:nvSpPr>
         <p:spPr>
           <a:xfrm>
-            <a:off x="868680" y="457200"/>
-            <a:ext cx="10424160" cy="1005840"/>
+            <a:off x="548640" y="457200"/>
+            <a:ext cx="8046720" cy="914400"/>
           </a:xfrm>
           <a:prstGeom prst="rect">
             <a:avLst/>
@@ -5287,36 +5531,188 @@
           </a:bodyPr>
           <a:lstStyle/>
           <a:p>
-            <a:pPr algn="l">
+            <a:r>
+              <a:rPr sz="3000" b="1" i="0">
+                <a:solidFill>
+                  <a:srgbClr val="1A3A4A"/>
+                </a:solidFill>
+                <a:latin typeface="Georgia"/>
+              </a:rPr>
+              <a:t>Vom Jahr in den Monat</a:t>
+            </a:r>
+          </a:p>
+        </p:txBody>
+      </p:sp>
+      <p:sp>
+        <p:nvSpPr>
+          <p:cNvPr id="3" name="TextBox 2"/>
+          <p:cNvSpPr txBox="1"/>
+          <p:nvPr/>
+        </p:nvSpPr>
+        <p:spPr>
+          <a:xfrm>
+            <a:off x="548640" y="1234440"/>
+            <a:ext cx="8046720" cy="457200"/>
+          </a:xfrm>
+          <a:prstGeom prst="rect">
+            <a:avLst/>
+          </a:prstGeom>
+          <a:noFill/>
+        </p:spPr>
+        <p:txBody>
+          <a:bodyPr wrap="square" anchor="t" lIns="0" rIns="0" tIns="0" bIns="0">
+            <a:spAutoFit/>
+          </a:bodyPr>
+          <a:lstStyle/>
+          <a:p>
+            <a:r>
+              <a:rPr sz="1300" b="0" i="0">
+                <a:solidFill>
+                  <a:srgbClr val="7A8A95"/>
+                </a:solidFill>
+                <a:latin typeface="Calibri"/>
+              </a:rPr>
+              <a:t>Pro Monat:</a:t>
+            </a:r>
+          </a:p>
+        </p:txBody>
+      </p:sp>
+      <p:sp>
+        <p:nvSpPr>
+          <p:cNvPr id="4" name="TextBox 3"/>
+          <p:cNvSpPr txBox="1"/>
+          <p:nvPr/>
+        </p:nvSpPr>
+        <p:spPr>
+          <a:xfrm>
+            <a:off x="548640" y="1783080"/>
+            <a:ext cx="8046720" cy="2788920"/>
+          </a:xfrm>
+          <a:prstGeom prst="rect">
+            <a:avLst/>
+          </a:prstGeom>
+          <a:noFill/>
+        </p:spPr>
+        <p:txBody>
+          <a:bodyPr wrap="square" anchor="t" lIns="0" rIns="0" tIns="0" bIns="0">
+            <a:spAutoFit/>
+          </a:bodyPr>
+          <a:lstStyle/>
+          <a:p>
+            <a:pPr>
               <a:spcBef>
                 <a:spcPts val="0"/>
               </a:spcBef>
               <a:spcAft>
-                <a:spcPts val="1000"/>
+                <a:spcPts val="900"/>
               </a:spcAft>
             </a:pPr>
             <a:r>
-              <a:rPr sz="3200" b="1" i="0">
-                <a:solidFill>
-                  <a:srgbClr val="1F6F6B"/>
-                </a:solidFill>
-                <a:latin typeface="Georgia"/>
-              </a:rPr>
-              <a:t>Vom Jahr in den Monat</a:t>
-            </a:r>
-          </a:p>
-        </p:txBody>
-      </p:sp>
-      <p:sp>
-        <p:nvSpPr>
-          <p:cNvPr id="4" name="TextBox 3"/>
+              <a:rPr sz="1600" b="1" i="0">
+                <a:solidFill>
+                  <a:srgbClr val="DC822E"/>
+                </a:solidFill>
+                <a:latin typeface="Calibri"/>
+              </a:rPr>
+              <a:t>▪  </a:t>
+            </a:r>
+            <a:r>
+              <a:rPr sz="1600" b="0" i="0">
+                <a:solidFill>
+                  <a:srgbClr val="2C3E50"/>
+                </a:solidFill>
+                <a:latin typeface="Calibri"/>
+              </a:rPr>
+              <a:t>1 Monatsfokus</a:t>
+            </a:r>
+          </a:p>
+          <a:p>
+            <a:pPr>
+              <a:spcBef>
+                <a:spcPts val="0"/>
+              </a:spcBef>
+              <a:spcAft>
+                <a:spcPts val="900"/>
+              </a:spcAft>
+            </a:pPr>
+            <a:r>
+              <a:rPr sz="1600" b="1" i="0">
+                <a:solidFill>
+                  <a:srgbClr val="DC822E"/>
+                </a:solidFill>
+                <a:latin typeface="Calibri"/>
+              </a:rPr>
+              <a:t>▪  </a:t>
+            </a:r>
+            <a:r>
+              <a:rPr sz="1600" b="0" i="0">
+                <a:solidFill>
+                  <a:srgbClr val="2C3E50"/>
+                </a:solidFill>
+                <a:latin typeface="Calibri"/>
+              </a:rPr>
+              <a:t>3 Monatsziele</a:t>
+            </a:r>
+          </a:p>
+          <a:p>
+            <a:pPr>
+              <a:spcBef>
+                <a:spcPts val="0"/>
+              </a:spcBef>
+              <a:spcAft>
+                <a:spcPts val="900"/>
+              </a:spcAft>
+            </a:pPr>
+            <a:r>
+              <a:rPr sz="1600" b="1" i="0">
+                <a:solidFill>
+                  <a:srgbClr val="DC822E"/>
+                </a:solidFill>
+                <a:latin typeface="Calibri"/>
+              </a:rPr>
+              <a:t>▪  </a:t>
+            </a:r>
+            <a:r>
+              <a:rPr sz="1600" b="0" i="0">
+                <a:solidFill>
+                  <a:srgbClr val="2C3E50"/>
+                </a:solidFill>
+                <a:latin typeface="Calibri"/>
+              </a:rPr>
+              <a:t>+ welche Lebens-Bereiche diesen Monat aktiv sind</a:t>
+            </a:r>
+          </a:p>
+          <a:p>
+            <a:pPr>
+              <a:spcBef>
+                <a:spcPts val="0"/>
+              </a:spcBef>
+              <a:spcAft>
+                <a:spcPts val="800"/>
+              </a:spcAft>
+            </a:pPr>
+            <a:r>
+              <a:rPr sz="1400" b="0" i="1">
+                <a:solidFill>
+                  <a:srgbClr val="7A8A95"/>
+                </a:solidFill>
+                <a:latin typeface="Calibri"/>
+              </a:rPr>
+              <a:t>Nicht jeder Bereich muss jeden Monat laufen.</a:t>
+            </a:r>
+          </a:p>
+        </p:txBody>
+      </p:sp>
+      <p:sp>
+        <p:nvSpPr>
+          <p:cNvPr id="5" name="TextBox 4"/>
           <p:cNvSpPr txBox="1"/>
           <p:nvPr/>
         </p:nvSpPr>
         <p:spPr>
           <a:xfrm>
-            <a:off x="868680" y="1783080"/>
-            <a:ext cx="10424160" cy="4572000"/>
+            <a:off x="457200" y="4754880"/>
+            <a:ext cx="5486400" cy="274320"/>
           </a:xfrm>
           <a:prstGeom prst="rect">
             <a:avLst/>
@@ -5329,98 +5725,49 @@
           </a:bodyPr>
           <a:lstStyle/>
           <a:p>
-            <a:pPr algn="l">
-              <a:spcBef>
-                <a:spcPts val="0"/>
-              </a:spcBef>
-              <a:spcAft>
-                <a:spcPts val="1400"/>
-              </a:spcAft>
-            </a:pPr>
-            <a:r>
-              <a:rPr sz="2100" b="0" i="0">
-                <a:solidFill>
-                  <a:srgbClr val="2A2A2A"/>
+            <a:r>
+              <a:rPr sz="900" b="0" i="0">
+                <a:solidFill>
+                  <a:srgbClr val="7A8A95"/>
                 </a:solidFill>
                 <a:latin typeface="Calibri"/>
               </a:rPr>
-              <a:t>Pro Monat:</a:t>
-            </a:r>
-          </a:p>
-          <a:p>
-            <a:pPr algn="l">
-              <a:spcBef>
-                <a:spcPts val="0"/>
-              </a:spcBef>
-              <a:spcAft>
-                <a:spcPts val="1400"/>
-              </a:spcAft>
-            </a:pPr>
-            <a:r>
-              <a:rPr sz="2100" b="0" i="0">
-                <a:solidFill>
-                  <a:srgbClr val="2A2A2A"/>
+              <a:t>Mama-CEO · Säule 3 · Lektion 3.4</a:t>
+            </a:r>
+          </a:p>
+        </p:txBody>
+      </p:sp>
+      <p:sp>
+        <p:nvSpPr>
+          <p:cNvPr id="6" name="TextBox 5"/>
+          <p:cNvSpPr txBox="1"/>
+          <p:nvPr/>
+        </p:nvSpPr>
+        <p:spPr>
+          <a:xfrm>
+            <a:off x="6400800" y="4754880"/>
+            <a:ext cx="2286000" cy="274320"/>
+          </a:xfrm>
+          <a:prstGeom prst="rect">
+            <a:avLst/>
+          </a:prstGeom>
+          <a:noFill/>
+        </p:spPr>
+        <p:txBody>
+          <a:bodyPr wrap="square" anchor="t" lIns="0" rIns="0" tIns="0" bIns="0">
+            <a:spAutoFit/>
+          </a:bodyPr>
+          <a:lstStyle/>
+          <a:p>
+            <a:pPr algn="r"/>
+            <a:r>
+              <a:rPr sz="900" b="0" i="0">
+                <a:solidFill>
+                  <a:srgbClr val="7A8A95"/>
                 </a:solidFill>
                 <a:latin typeface="Calibri"/>
               </a:rPr>
-              <a:t>1 Monatsfokus</a:t>
-            </a:r>
-          </a:p>
-          <a:p>
-            <a:pPr algn="l">
-              <a:spcBef>
-                <a:spcPts val="0"/>
-              </a:spcBef>
-              <a:spcAft>
-                <a:spcPts val="1400"/>
-              </a:spcAft>
-            </a:pPr>
-            <a:r>
-              <a:rPr sz="2100" b="0" i="0">
-                <a:solidFill>
-                  <a:srgbClr val="2A2A2A"/>
-                </a:solidFill>
-                <a:latin typeface="Calibri"/>
-              </a:rPr>
-              <a:t>3 Monatsziele</a:t>
-            </a:r>
-          </a:p>
-          <a:p>
-            <a:pPr algn="l">
-              <a:spcBef>
-                <a:spcPts val="0"/>
-              </a:spcBef>
-              <a:spcAft>
-                <a:spcPts val="1400"/>
-              </a:spcAft>
-            </a:pPr>
-            <a:r>
-              <a:rPr sz="2100" b="0" i="0">
-                <a:solidFill>
-                  <a:srgbClr val="2A2A2A"/>
-                </a:solidFill>
-                <a:latin typeface="Calibri"/>
-              </a:rPr>
-              <a:t>+ welche Lebens-Bereiche diesen Monat aktiv sind</a:t>
-            </a:r>
-          </a:p>
-          <a:p>
-            <a:pPr algn="l">
-              <a:spcBef>
-                <a:spcPts val="0"/>
-              </a:spcBef>
-              <a:spcAft>
-                <a:spcPts val="1400"/>
-              </a:spcAft>
-            </a:pPr>
-            <a:r>
-              <a:rPr sz="2000" b="0" i="1">
-                <a:solidFill>
-                  <a:srgbClr val="6E6E6E"/>
-                </a:solidFill>
-                <a:latin typeface="Calibri"/>
-              </a:rPr>
-              <a:t>Nicht jeder Bereich muss jeden Monat laufen.</a:t>
+              <a:t>Mum Life Balance</a:t>
             </a:r>
           </a:p>
         </p:txBody>
@@ -5453,58 +5800,14 @@
       <p:grpSpPr/>
       <p:sp>
         <p:nvSpPr>
-          <p:cNvPr id="2" name="Rectangle 1"/>
-          <p:cNvSpPr/>
-          <p:nvPr/>
-        </p:nvSpPr>
-        <p:spPr>
-          <a:xfrm>
-            <a:off x="548640" y="502920"/>
-            <a:ext cx="201168" cy="201168"/>
-          </a:xfrm>
-          <a:prstGeom prst="rect">
-            <a:avLst/>
-          </a:prstGeom>
-          <a:solidFill>
-            <a:srgbClr val="1F6F6B"/>
-          </a:solidFill>
-          <a:ln>
-            <a:noFill/>
-          </a:ln>
-          <a:effectLst/>
-        </p:spPr>
-        <p:style>
-          <a:lnRef idx="1">
-            <a:schemeClr val="accent1"/>
-          </a:lnRef>
-          <a:fillRef idx="3">
-            <a:schemeClr val="accent1"/>
-          </a:fillRef>
-          <a:effectRef idx="2">
-            <a:schemeClr val="accent1"/>
-          </a:effectRef>
-          <a:fontRef idx="minor">
-            <a:schemeClr val="lt1"/>
-          </a:fontRef>
-        </p:style>
-        <p:txBody>
-          <a:bodyPr rtlCol="0" anchor="ctr"/>
-          <a:lstStyle/>
-          <a:p>
-            <a:pPr algn="ctr"/>
-          </a:p>
-        </p:txBody>
-      </p:sp>
-      <p:sp>
-        <p:nvSpPr>
-          <p:cNvPr id="3" name="TextBox 2"/>
+          <p:cNvPr id="2" name="TextBox 1"/>
           <p:cNvSpPr txBox="1"/>
           <p:nvPr/>
         </p:nvSpPr>
         <p:spPr>
           <a:xfrm>
-            <a:off x="868680" y="457200"/>
-            <a:ext cx="10424160" cy="1005840"/>
+            <a:off x="548640" y="457200"/>
+            <a:ext cx="8046720" cy="914400"/>
           </a:xfrm>
           <a:prstGeom prst="rect">
             <a:avLst/>
@@ -5517,22 +5820,94 @@
           </a:bodyPr>
           <a:lstStyle/>
           <a:p>
-            <a:pPr algn="l">
+            <a:r>
+              <a:rPr sz="3000" b="1" i="0">
+                <a:solidFill>
+                  <a:srgbClr val="1A3A4A"/>
+                </a:solidFill>
+                <a:latin typeface="Georgia"/>
+              </a:rPr>
+              <a:t>Beispiel-Monat</a:t>
+            </a:r>
+          </a:p>
+        </p:txBody>
+      </p:sp>
+      <p:sp>
+        <p:nvSpPr>
+          <p:cNvPr id="3" name="TextBox 2"/>
+          <p:cNvSpPr txBox="1"/>
+          <p:nvPr/>
+        </p:nvSpPr>
+        <p:spPr>
+          <a:xfrm>
+            <a:off x="548640" y="1417320"/>
+            <a:ext cx="8046720" cy="3154680"/>
+          </a:xfrm>
+          <a:prstGeom prst="rect">
+            <a:avLst/>
+          </a:prstGeom>
+          <a:noFill/>
+        </p:spPr>
+        <p:txBody>
+          <a:bodyPr wrap="square" anchor="t" lIns="0" rIns="0" tIns="0" bIns="0">
+            <a:spAutoFit/>
+          </a:bodyPr>
+          <a:lstStyle/>
+          <a:p>
+            <a:pPr>
               <a:spcBef>
                 <a:spcPts val="0"/>
               </a:spcBef>
               <a:spcAft>
-                <a:spcPts val="1000"/>
+                <a:spcPts val="900"/>
               </a:spcAft>
             </a:pPr>
             <a:r>
-              <a:rPr sz="3200" b="1" i="0">
-                <a:solidFill>
-                  <a:srgbClr val="1F6F6B"/>
-                </a:solidFill>
-                <a:latin typeface="Georgia"/>
-              </a:rPr>
-              <a:t>Beispiel-Monat</a:t>
+              <a:rPr sz="1600" b="0" i="0">
+                <a:solidFill>
+                  <a:srgbClr val="2C3E50"/>
+                </a:solidFill>
+                <a:latin typeface="Calibri"/>
+              </a:rPr>
+              <a:t>Fokus: „meinen Pilot gut begleiten“</a:t>
+            </a:r>
+          </a:p>
+          <a:p>
+            <a:pPr>
+              <a:spcBef>
+                <a:spcPts val="0"/>
+              </a:spcBef>
+              <a:spcAft>
+                <a:spcPts val="900"/>
+              </a:spcAft>
+            </a:pPr>
+            <a:r>
+              <a:rPr sz="1600" b="0" i="0">
+                <a:solidFill>
+                  <a:srgbClr val="2C3E50"/>
+                </a:solidFill>
+                <a:latin typeface="Calibri"/>
+              </a:rPr>
+              <a:t>3 konkrete Ziele · aktive Bereiche markiert · evtl. 1 Launch</a:t>
+            </a:r>
+          </a:p>
+          <a:p>
+            <a:pPr>
+              <a:spcBef>
+                <a:spcPts val="0"/>
+              </a:spcBef>
+              <a:spcAft>
+                <a:spcPts val="800"/>
+              </a:spcAft>
+            </a:pPr>
+            <a:r>
+              <a:rPr sz="1400" b="0" i="1">
+                <a:solidFill>
+                  <a:srgbClr val="7A8A95"/>
+                </a:solidFill>
+                <a:latin typeface="Calibri"/>
+              </a:rPr>
+              <a:t>Mal ist Produkterstellung gross dabei, mal gar nicht. Alles ordnet sich dem Fokus unter.</a:t>
             </a:r>
           </a:p>
         </p:txBody>
@@ -5545,8 +5920,8 @@
         </p:nvSpPr>
         <p:spPr>
           <a:xfrm>
-            <a:off x="868680" y="1783080"/>
-            <a:ext cx="10424160" cy="4572000"/>
+            <a:off x="457200" y="4754880"/>
+            <a:ext cx="5486400" cy="274320"/>
           </a:xfrm>
           <a:prstGeom prst="rect">
             <a:avLst/>
@@ -5559,79 +5934,49 @@
           </a:bodyPr>
           <a:lstStyle/>
           <a:p>
-            <a:pPr algn="l">
-              <a:spcBef>
-                <a:spcPts val="0"/>
-              </a:spcBef>
-              <a:spcAft>
-                <a:spcPts val="1400"/>
-              </a:spcAft>
-            </a:pPr>
-            <a:r>
-              <a:rPr sz="2100" b="0" i="0">
-                <a:solidFill>
-                  <a:srgbClr val="2A2A2A"/>
+            <a:r>
+              <a:rPr sz="900" b="0" i="0">
+                <a:solidFill>
+                  <a:srgbClr val="7A8A95"/>
                 </a:solidFill>
                 <a:latin typeface="Calibri"/>
               </a:rPr>
-              <a:t>Fokus: „meinen Pilot gut begleiten“</a:t>
-            </a:r>
-          </a:p>
-          <a:p>
-            <a:pPr algn="l">
-              <a:spcBef>
-                <a:spcPts val="0"/>
-              </a:spcBef>
-              <a:spcAft>
-                <a:spcPts val="1400"/>
-              </a:spcAft>
-            </a:pPr>
-            <a:r>
-              <a:rPr sz="2100" b="0" i="0">
-                <a:solidFill>
-                  <a:srgbClr val="2A2A2A"/>
+              <a:t>Mama-CEO · Säule 3 · Lektion 3.4</a:t>
+            </a:r>
+          </a:p>
+        </p:txBody>
+      </p:sp>
+      <p:sp>
+        <p:nvSpPr>
+          <p:cNvPr id="5" name="TextBox 4"/>
+          <p:cNvSpPr txBox="1"/>
+          <p:nvPr/>
+        </p:nvSpPr>
+        <p:spPr>
+          <a:xfrm>
+            <a:off x="6400800" y="4754880"/>
+            <a:ext cx="2286000" cy="274320"/>
+          </a:xfrm>
+          <a:prstGeom prst="rect">
+            <a:avLst/>
+          </a:prstGeom>
+          <a:noFill/>
+        </p:spPr>
+        <p:txBody>
+          <a:bodyPr wrap="square" anchor="t" lIns="0" rIns="0" tIns="0" bIns="0">
+            <a:spAutoFit/>
+          </a:bodyPr>
+          <a:lstStyle/>
+          <a:p>
+            <a:pPr algn="r"/>
+            <a:r>
+              <a:rPr sz="900" b="0" i="0">
+                <a:solidFill>
+                  <a:srgbClr val="7A8A95"/>
                 </a:solidFill>
                 <a:latin typeface="Calibri"/>
               </a:rPr>
-              <a:t>3 konkrete Ziele</a:t>
-            </a:r>
-          </a:p>
-          <a:p>
-            <a:pPr algn="l">
-              <a:spcBef>
-                <a:spcPts val="0"/>
-              </a:spcBef>
-              <a:spcAft>
-                <a:spcPts val="1400"/>
-              </a:spcAft>
-            </a:pPr>
-            <a:r>
-              <a:rPr sz="2100" b="0" i="0">
-                <a:solidFill>
-                  <a:srgbClr val="2A2A2A"/>
-                </a:solidFill>
-                <a:latin typeface="Calibri"/>
-              </a:rPr>
-              <a:t>aktive Bereiche markiert · evtl. 1 Launch</a:t>
-            </a:r>
-          </a:p>
-          <a:p>
-            <a:pPr algn="l">
-              <a:spcBef>
-                <a:spcPts val="0"/>
-              </a:spcBef>
-              <a:spcAft>
-                <a:spcPts val="1400"/>
-              </a:spcAft>
-            </a:pPr>
-            <a:r>
-              <a:rPr sz="2000" b="0" i="1">
-                <a:solidFill>
-                  <a:srgbClr val="6E6E6E"/>
-                </a:solidFill>
-                <a:latin typeface="Calibri"/>
-              </a:rPr>
-              <a:t>In einem Monat ist Produkterstellung gross dabei, im nächsten gar nicht.</a:t>
+              <a:t>Mum Life Balance</a:t>
             </a:r>
           </a:p>
         </p:txBody>
@@ -5664,58 +6009,14 @@
       <p:grpSpPr/>
       <p:sp>
         <p:nvSpPr>
-          <p:cNvPr id="2" name="Rectangle 1"/>
-          <p:cNvSpPr/>
-          <p:nvPr/>
-        </p:nvSpPr>
-        <p:spPr>
-          <a:xfrm>
-            <a:off x="548640" y="502920"/>
-            <a:ext cx="201168" cy="201168"/>
-          </a:xfrm>
-          <a:prstGeom prst="rect">
-            <a:avLst/>
-          </a:prstGeom>
-          <a:solidFill>
-            <a:srgbClr val="1F6F6B"/>
-          </a:solidFill>
-          <a:ln>
-            <a:noFill/>
-          </a:ln>
-          <a:effectLst/>
-        </p:spPr>
-        <p:style>
-          <a:lnRef idx="1">
-            <a:schemeClr val="accent1"/>
-          </a:lnRef>
-          <a:fillRef idx="3">
-            <a:schemeClr val="accent1"/>
-          </a:fillRef>
-          <a:effectRef idx="2">
-            <a:schemeClr val="accent1"/>
-          </a:effectRef>
-          <a:fontRef idx="minor">
-            <a:schemeClr val="lt1"/>
-          </a:fontRef>
-        </p:style>
-        <p:txBody>
-          <a:bodyPr rtlCol="0" anchor="ctr"/>
-          <a:lstStyle/>
-          <a:p>
-            <a:pPr algn="ctr"/>
-          </a:p>
-        </p:txBody>
-      </p:sp>
-      <p:sp>
-        <p:nvSpPr>
-          <p:cNvPr id="3" name="TextBox 2"/>
+          <p:cNvPr id="2" name="TextBox 1"/>
           <p:cNvSpPr txBox="1"/>
           <p:nvPr/>
         </p:nvSpPr>
         <p:spPr>
           <a:xfrm>
-            <a:off x="868680" y="457200"/>
-            <a:ext cx="10424160" cy="1005840"/>
+            <a:off x="548640" y="457200"/>
+            <a:ext cx="8046720" cy="914400"/>
           </a:xfrm>
           <a:prstGeom prst="rect">
             <a:avLst/>
@@ -5728,36 +6029,188 @@
           </a:bodyPr>
           <a:lstStyle/>
           <a:p>
-            <a:pPr algn="l">
+            <a:r>
+              <a:rPr sz="3000" b="1" i="0">
+                <a:solidFill>
+                  <a:srgbClr val="1A3A4A"/>
+                </a:solidFill>
+                <a:latin typeface="Georgia"/>
+              </a:rPr>
+              <a:t>Die Woche — hier lebt dein Plan</a:t>
+            </a:r>
+          </a:p>
+        </p:txBody>
+      </p:sp>
+      <p:sp>
+        <p:nvSpPr>
+          <p:cNvPr id="3" name="TextBox 2"/>
+          <p:cNvSpPr txBox="1"/>
+          <p:nvPr/>
+        </p:nvSpPr>
+        <p:spPr>
+          <a:xfrm>
+            <a:off x="548640" y="1234440"/>
+            <a:ext cx="8046720" cy="457200"/>
+          </a:xfrm>
+          <a:prstGeom prst="rect">
+            <a:avLst/>
+          </a:prstGeom>
+          <a:noFill/>
+        </p:spPr>
+        <p:txBody>
+          <a:bodyPr wrap="square" anchor="t" lIns="0" rIns="0" tIns="0" bIns="0">
+            <a:spAutoFit/>
+          </a:bodyPr>
+          <a:lstStyle/>
+          <a:p>
+            <a:r>
+              <a:rPr sz="1300" b="0" i="0">
+                <a:solidFill>
+                  <a:srgbClr val="7A8A95"/>
+                </a:solidFill>
+                <a:latin typeface="Calibri"/>
+              </a:rPr>
+              <a:t>Jede Woche hat:</a:t>
+            </a:r>
+          </a:p>
+        </p:txBody>
+      </p:sp>
+      <p:sp>
+        <p:nvSpPr>
+          <p:cNvPr id="4" name="TextBox 3"/>
+          <p:cNvSpPr txBox="1"/>
+          <p:nvPr/>
+        </p:nvSpPr>
+        <p:spPr>
+          <a:xfrm>
+            <a:off x="548640" y="1783080"/>
+            <a:ext cx="8046720" cy="2788920"/>
+          </a:xfrm>
+          <a:prstGeom prst="rect">
+            <a:avLst/>
+          </a:prstGeom>
+          <a:noFill/>
+        </p:spPr>
+        <p:txBody>
+          <a:bodyPr wrap="square" anchor="t" lIns="0" rIns="0" tIns="0" bIns="0">
+            <a:spAutoFit/>
+          </a:bodyPr>
+          <a:lstStyle/>
+          <a:p>
+            <a:pPr>
               <a:spcBef>
                 <a:spcPts val="0"/>
               </a:spcBef>
               <a:spcAft>
-                <a:spcPts val="1000"/>
+                <a:spcPts val="900"/>
               </a:spcAft>
             </a:pPr>
             <a:r>
-              <a:rPr sz="3200" b="1" i="0">
-                <a:solidFill>
-                  <a:srgbClr val="1F6F6B"/>
-                </a:solidFill>
-                <a:latin typeface="Georgia"/>
-              </a:rPr>
-              <a:t>Die Woche — hier lebt dein Plan</a:t>
-            </a:r>
-          </a:p>
-        </p:txBody>
-      </p:sp>
-      <p:sp>
-        <p:nvSpPr>
-          <p:cNvPr id="4" name="TextBox 3"/>
+              <a:rPr sz="1600" b="1" i="0">
+                <a:solidFill>
+                  <a:srgbClr val="DC822E"/>
+                </a:solidFill>
+                <a:latin typeface="Calibri"/>
+              </a:rPr>
+              <a:t>▪  </a:t>
+            </a:r>
+            <a:r>
+              <a:rPr sz="1600" b="0" i="0">
+                <a:solidFill>
+                  <a:srgbClr val="2C3E50"/>
+                </a:solidFill>
+                <a:latin typeface="Calibri"/>
+              </a:rPr>
+              <a:t>eine KW-Nummer</a:t>
+            </a:r>
+          </a:p>
+          <a:p>
+            <a:pPr>
+              <a:spcBef>
+                <a:spcPts val="0"/>
+              </a:spcBef>
+              <a:spcAft>
+                <a:spcPts val="900"/>
+              </a:spcAft>
+            </a:pPr>
+            <a:r>
+              <a:rPr sz="1600" b="1" i="0">
+                <a:solidFill>
+                  <a:srgbClr val="DC822E"/>
+                </a:solidFill>
+                <a:latin typeface="Calibri"/>
+              </a:rPr>
+              <a:t>▪  </a:t>
+            </a:r>
+            <a:r>
+              <a:rPr sz="1600" b="0" i="0">
+                <a:solidFill>
+                  <a:srgbClr val="2C3E50"/>
+                </a:solidFill>
+                <a:latin typeface="Calibri"/>
+              </a:rPr>
+              <a:t>eine Fokus-Säule (Plattform · Produkt · Verkauf)</a:t>
+            </a:r>
+          </a:p>
+          <a:p>
+            <a:pPr>
+              <a:spcBef>
+                <a:spcPts val="0"/>
+              </a:spcBef>
+              <a:spcAft>
+                <a:spcPts val="900"/>
+              </a:spcAft>
+            </a:pPr>
+            <a:r>
+              <a:rPr sz="1600" b="1" i="0">
+                <a:solidFill>
+                  <a:srgbClr val="DC822E"/>
+                </a:solidFill>
+                <a:latin typeface="Calibri"/>
+              </a:rPr>
+              <a:t>▪  </a:t>
+            </a:r>
+            <a:r>
+              <a:rPr sz="1600" b="0" i="0">
+                <a:solidFill>
+                  <a:srgbClr val="2C3E50"/>
+                </a:solidFill>
+                <a:latin typeface="Calibri"/>
+              </a:rPr>
+              <a:t>ein Hauptziel</a:t>
+            </a:r>
+          </a:p>
+          <a:p>
+            <a:pPr>
+              <a:spcBef>
+                <a:spcPts val="0"/>
+              </a:spcBef>
+              <a:spcAft>
+                <a:spcPts val="800"/>
+              </a:spcAft>
+            </a:pPr>
+            <a:r>
+              <a:rPr sz="1400" b="0" i="1">
+                <a:solidFill>
+                  <a:srgbClr val="7A8A95"/>
+                </a:solidFill>
+                <a:latin typeface="Calibri"/>
+              </a:rPr>
+              <a:t>Das ist der Rahmen für deine Lebens-Bereiche.</a:t>
+            </a:r>
+          </a:p>
+        </p:txBody>
+      </p:sp>
+      <p:sp>
+        <p:nvSpPr>
+          <p:cNvPr id="5" name="TextBox 4"/>
           <p:cNvSpPr txBox="1"/>
           <p:nvPr/>
         </p:nvSpPr>
         <p:spPr>
           <a:xfrm>
-            <a:off x="868680" y="1783080"/>
-            <a:ext cx="10424160" cy="4572000"/>
+            <a:off x="457200" y="4754880"/>
+            <a:ext cx="5486400" cy="274320"/>
           </a:xfrm>
           <a:prstGeom prst="rect">
             <a:avLst/>
@@ -5770,98 +6223,49 @@
           </a:bodyPr>
           <a:lstStyle/>
           <a:p>
-            <a:pPr algn="l">
-              <a:spcBef>
-                <a:spcPts val="0"/>
-              </a:spcBef>
-              <a:spcAft>
-                <a:spcPts val="1400"/>
-              </a:spcAft>
-            </a:pPr>
-            <a:r>
-              <a:rPr sz="2100" b="0" i="0">
-                <a:solidFill>
-                  <a:srgbClr val="2A2A2A"/>
+            <a:r>
+              <a:rPr sz="900" b="0" i="0">
+                <a:solidFill>
+                  <a:srgbClr val="7A8A95"/>
                 </a:solidFill>
                 <a:latin typeface="Calibri"/>
               </a:rPr>
-              <a:t>Jede Woche hat:</a:t>
-            </a:r>
-          </a:p>
-          <a:p>
-            <a:pPr algn="l">
-              <a:spcBef>
-                <a:spcPts val="0"/>
-              </a:spcBef>
-              <a:spcAft>
-                <a:spcPts val="1400"/>
-              </a:spcAft>
-            </a:pPr>
-            <a:r>
-              <a:rPr sz="2100" b="0" i="0">
-                <a:solidFill>
-                  <a:srgbClr val="2A2A2A"/>
+              <a:t>Mama-CEO · Säule 3 · Lektion 3.4</a:t>
+            </a:r>
+          </a:p>
+        </p:txBody>
+      </p:sp>
+      <p:sp>
+        <p:nvSpPr>
+          <p:cNvPr id="6" name="TextBox 5"/>
+          <p:cNvSpPr txBox="1"/>
+          <p:nvPr/>
+        </p:nvSpPr>
+        <p:spPr>
+          <a:xfrm>
+            <a:off x="6400800" y="4754880"/>
+            <a:ext cx="2286000" cy="274320"/>
+          </a:xfrm>
+          <a:prstGeom prst="rect">
+            <a:avLst/>
+          </a:prstGeom>
+          <a:noFill/>
+        </p:spPr>
+        <p:txBody>
+          <a:bodyPr wrap="square" anchor="t" lIns="0" rIns="0" tIns="0" bIns="0">
+            <a:spAutoFit/>
+          </a:bodyPr>
+          <a:lstStyle/>
+          <a:p>
+            <a:pPr algn="r"/>
+            <a:r>
+              <a:rPr sz="900" b="0" i="0">
+                <a:solidFill>
+                  <a:srgbClr val="7A8A95"/>
                 </a:solidFill>
                 <a:latin typeface="Calibri"/>
               </a:rPr>
-              <a:t>eine KW-Nummer</a:t>
-            </a:r>
-          </a:p>
-          <a:p>
-            <a:pPr algn="l">
-              <a:spcBef>
-                <a:spcPts val="0"/>
-              </a:spcBef>
-              <a:spcAft>
-                <a:spcPts val="1400"/>
-              </a:spcAft>
-            </a:pPr>
-            <a:r>
-              <a:rPr sz="2100" b="0" i="0">
-                <a:solidFill>
-                  <a:srgbClr val="2A2A2A"/>
-                </a:solidFill>
-                <a:latin typeface="Calibri"/>
-              </a:rPr>
-              <a:t>eine Fokus-Säule (Plattform · Produkt · Verkauf)</a:t>
-            </a:r>
-          </a:p>
-          <a:p>
-            <a:pPr algn="l">
-              <a:spcBef>
-                <a:spcPts val="0"/>
-              </a:spcBef>
-              <a:spcAft>
-                <a:spcPts val="1400"/>
-              </a:spcAft>
-            </a:pPr>
-            <a:r>
-              <a:rPr sz="2100" b="0" i="0">
-                <a:solidFill>
-                  <a:srgbClr val="2A2A2A"/>
-                </a:solidFill>
-                <a:latin typeface="Calibri"/>
-              </a:rPr>
-              <a:t>ein Hauptziel</a:t>
-            </a:r>
-          </a:p>
-          <a:p>
-            <a:pPr algn="l">
-              <a:spcBef>
-                <a:spcPts val="0"/>
-              </a:spcBef>
-              <a:spcAft>
-                <a:spcPts val="1400"/>
-              </a:spcAft>
-            </a:pPr>
-            <a:r>
-              <a:rPr sz="2000" b="0" i="1">
-                <a:solidFill>
-                  <a:srgbClr val="6E6E6E"/>
-                </a:solidFill>
-                <a:latin typeface="Calibri"/>
-              </a:rPr>
-              <a:t>Das ist der Rahmen für deine Lebens-Bereiche.</a:t>
+              <a:t>Mum Life Balance</a:t>
             </a:r>
           </a:p>
         </p:txBody>
@@ -5894,58 +6298,14 @@
       <p:grpSpPr/>
       <p:sp>
         <p:nvSpPr>
-          <p:cNvPr id="2" name="Rectangle 1"/>
-          <p:cNvSpPr/>
-          <p:nvPr/>
-        </p:nvSpPr>
-        <p:spPr>
-          <a:xfrm>
-            <a:off x="548640" y="502920"/>
-            <a:ext cx="201168" cy="201168"/>
-          </a:xfrm>
-          <a:prstGeom prst="rect">
-            <a:avLst/>
-          </a:prstGeom>
-          <a:solidFill>
-            <a:srgbClr val="1F6F6B"/>
-          </a:solidFill>
-          <a:ln>
-            <a:noFill/>
-          </a:ln>
-          <a:effectLst/>
-        </p:spPr>
-        <p:style>
-          <a:lnRef idx="1">
-            <a:schemeClr val="accent1"/>
-          </a:lnRef>
-          <a:fillRef idx="3">
-            <a:schemeClr val="accent1"/>
-          </a:fillRef>
-          <a:effectRef idx="2">
-            <a:schemeClr val="accent1"/>
-          </a:effectRef>
-          <a:fontRef idx="minor">
-            <a:schemeClr val="lt1"/>
-          </a:fontRef>
-        </p:style>
-        <p:txBody>
-          <a:bodyPr rtlCol="0" anchor="ctr"/>
-          <a:lstStyle/>
-          <a:p>
-            <a:pPr algn="ctr"/>
-          </a:p>
-        </p:txBody>
-      </p:sp>
-      <p:sp>
-        <p:nvSpPr>
-          <p:cNvPr id="3" name="TextBox 2"/>
+          <p:cNvPr id="2" name="TextBox 1"/>
           <p:cNvSpPr txBox="1"/>
           <p:nvPr/>
         </p:nvSpPr>
         <p:spPr>
           <a:xfrm>
-            <a:off x="868680" y="457200"/>
-            <a:ext cx="10424160" cy="1005840"/>
+            <a:off x="548640" y="457200"/>
+            <a:ext cx="8046720" cy="914400"/>
           </a:xfrm>
           <a:prstGeom prst="rect">
             <a:avLst/>
@@ -5958,22 +6318,205 @@
           </a:bodyPr>
           <a:lstStyle/>
           <a:p>
-            <a:pPr algn="l">
+            <a:r>
+              <a:rPr sz="3000" b="1" i="0">
+                <a:solidFill>
+                  <a:srgbClr val="1A3A4A"/>
+                </a:solidFill>
+                <a:latin typeface="Georgia"/>
+              </a:rPr>
+              <a:t>Die 6 Lebens-Bereiche</a:t>
+            </a:r>
+          </a:p>
+        </p:txBody>
+      </p:sp>
+      <p:sp>
+        <p:nvSpPr>
+          <p:cNvPr id="3" name="TextBox 2"/>
+          <p:cNvSpPr txBox="1"/>
+          <p:nvPr/>
+        </p:nvSpPr>
+        <p:spPr>
+          <a:xfrm>
+            <a:off x="548640" y="1417320"/>
+            <a:ext cx="8046720" cy="3154680"/>
+          </a:xfrm>
+          <a:prstGeom prst="rect">
+            <a:avLst/>
+          </a:prstGeom>
+          <a:noFill/>
+        </p:spPr>
+        <p:txBody>
+          <a:bodyPr wrap="square" anchor="t" lIns="0" rIns="0" tIns="0" bIns="0">
+            <a:spAutoFit/>
+          </a:bodyPr>
+          <a:lstStyle/>
+          <a:p>
+            <a:pPr>
               <a:spcBef>
                 <a:spcPts val="0"/>
               </a:spcBef>
               <a:spcAft>
-                <a:spcPts val="1000"/>
+                <a:spcPts val="900"/>
               </a:spcAft>
             </a:pPr>
             <a:r>
-              <a:rPr sz="3200" b="1" i="0">
-                <a:solidFill>
-                  <a:srgbClr val="1F6F6B"/>
-                </a:solidFill>
-                <a:latin typeface="Georgia"/>
-              </a:rPr>
-              <a:t>Die 6 Lebens-Bereiche</a:t>
+              <a:rPr sz="1600" b="1" i="0">
+                <a:solidFill>
+                  <a:srgbClr val="DC822E"/>
+                </a:solidFill>
+                <a:latin typeface="Calibri"/>
+              </a:rPr>
+              <a:t>▪  </a:t>
+            </a:r>
+            <a:r>
+              <a:rPr sz="1600" b="0" i="0">
+                <a:solidFill>
+                  <a:srgbClr val="2C3E50"/>
+                </a:solidFill>
+                <a:latin typeface="Calibri"/>
+              </a:rPr>
+              <a:t>🛍  Produkterstellung</a:t>
+            </a:r>
+          </a:p>
+          <a:p>
+            <a:pPr>
+              <a:spcBef>
+                <a:spcPts val="0"/>
+              </a:spcBef>
+              <a:spcAft>
+                <a:spcPts val="900"/>
+              </a:spcAft>
+            </a:pPr>
+            <a:r>
+              <a:rPr sz="1600" b="1" i="0">
+                <a:solidFill>
+                  <a:srgbClr val="DC822E"/>
+                </a:solidFill>
+                <a:latin typeface="Calibri"/>
+              </a:rPr>
+              <a:t>▪  </a:t>
+            </a:r>
+            <a:r>
+              <a:rPr sz="1600" b="0" i="0">
+                <a:solidFill>
+                  <a:srgbClr val="2C3E50"/>
+                </a:solidFill>
+                <a:latin typeface="Calibri"/>
+              </a:rPr>
+              <a:t>📱  Sichtbarkeit / Content</a:t>
+            </a:r>
+          </a:p>
+          <a:p>
+            <a:pPr>
+              <a:spcBef>
+                <a:spcPts val="0"/>
+              </a:spcBef>
+              <a:spcAft>
+                <a:spcPts val="900"/>
+              </a:spcAft>
+            </a:pPr>
+            <a:r>
+              <a:rPr sz="1600" b="1" i="0">
+                <a:solidFill>
+                  <a:srgbClr val="DC822E"/>
+                </a:solidFill>
+                <a:latin typeface="Calibri"/>
+              </a:rPr>
+              <a:t>▪  </a:t>
+            </a:r>
+            <a:r>
+              <a:rPr sz="1600" b="0" i="0">
+                <a:solidFill>
+                  <a:srgbClr val="2C3E50"/>
+                </a:solidFill>
+                <a:latin typeface="Calibri"/>
+              </a:rPr>
+              <a:t>💬  Kundenbetreuung</a:t>
+            </a:r>
+          </a:p>
+          <a:p>
+            <a:pPr>
+              <a:spcBef>
+                <a:spcPts val="0"/>
+              </a:spcBef>
+              <a:spcAft>
+                <a:spcPts val="900"/>
+              </a:spcAft>
+            </a:pPr>
+            <a:r>
+              <a:rPr sz="1600" b="1" i="0">
+                <a:solidFill>
+                  <a:srgbClr val="DC822E"/>
+                </a:solidFill>
+                <a:latin typeface="Calibri"/>
+              </a:rPr>
+              <a:t>▪  </a:t>
+            </a:r>
+            <a:r>
+              <a:rPr sz="1600" b="0" i="0">
+                <a:solidFill>
+                  <a:srgbClr val="2C3E50"/>
+                </a:solidFill>
+                <a:latin typeface="Calibri"/>
+              </a:rPr>
+              <a:t>🧘  Me-Time</a:t>
+            </a:r>
+          </a:p>
+          <a:p>
+            <a:pPr>
+              <a:spcBef>
+                <a:spcPts val="0"/>
+              </a:spcBef>
+              <a:spcAft>
+                <a:spcPts val="900"/>
+              </a:spcAft>
+            </a:pPr>
+            <a:r>
+              <a:rPr sz="1600" b="1" i="0">
+                <a:solidFill>
+                  <a:srgbClr val="DC822E"/>
+                </a:solidFill>
+                <a:latin typeface="Calibri"/>
+              </a:rPr>
+              <a:t>▪  </a:t>
+            </a:r>
+            <a:r>
+              <a:rPr sz="1600" b="0" i="0">
+                <a:solidFill>
+                  <a:srgbClr val="2C3E50"/>
+                </a:solidFill>
+                <a:latin typeface="Calibri"/>
+              </a:rPr>
+              <a:t>👨‍👩‍👧‍👦  Familie + Haushalt</a:t>
+            </a:r>
+          </a:p>
+          <a:p>
+            <a:pPr>
+              <a:spcBef>
+                <a:spcPts val="0"/>
+              </a:spcBef>
+              <a:spcAft>
+                <a:spcPts val="900"/>
+              </a:spcAft>
+            </a:pPr>
+            <a:r>
+              <a:rPr sz="1600" b="1" i="0">
+                <a:solidFill>
+                  <a:srgbClr val="DC822E"/>
+                </a:solidFill>
+                <a:latin typeface="Calibri"/>
+              </a:rPr>
+              <a:t>▪  </a:t>
+            </a:r>
+            <a:r>
+              <a:rPr sz="1600" b="0" i="0">
+                <a:solidFill>
+                  <a:srgbClr val="2C3E50"/>
+                </a:solidFill>
+                <a:latin typeface="Calibri"/>
+              </a:rPr>
+              <a:t>📊  Reflexion</a:t>
             </a:r>
           </a:p>
         </p:txBody>
@@ -5986,8 +6529,8 @@
         </p:nvSpPr>
         <p:spPr>
           <a:xfrm>
-            <a:off x="868680" y="1783080"/>
-            <a:ext cx="10424160" cy="4572000"/>
+            <a:off x="457200" y="4754880"/>
+            <a:ext cx="5486400" cy="274320"/>
           </a:xfrm>
           <a:prstGeom prst="rect">
             <a:avLst/>
@@ -6000,117 +6543,49 @@
           </a:bodyPr>
           <a:lstStyle/>
           <a:p>
-            <a:pPr algn="l">
-              <a:spcBef>
-                <a:spcPts val="0"/>
-              </a:spcBef>
-              <a:spcAft>
-                <a:spcPts val="1400"/>
-              </a:spcAft>
-            </a:pPr>
-            <a:r>
-              <a:rPr sz="2100" b="0" i="0">
-                <a:solidFill>
-                  <a:srgbClr val="2A2A2A"/>
+            <a:r>
+              <a:rPr sz="900" b="0" i="0">
+                <a:solidFill>
+                  <a:srgbClr val="7A8A95"/>
                 </a:solidFill>
                 <a:latin typeface="Calibri"/>
               </a:rPr>
-              <a:t>🛍  Produkterstellung</a:t>
-            </a:r>
-          </a:p>
-          <a:p>
-            <a:pPr algn="l">
-              <a:spcBef>
-                <a:spcPts val="0"/>
-              </a:spcBef>
-              <a:spcAft>
-                <a:spcPts val="1400"/>
-              </a:spcAft>
-            </a:pPr>
-            <a:r>
-              <a:rPr sz="2100" b="0" i="0">
-                <a:solidFill>
-                  <a:srgbClr val="2A2A2A"/>
+              <a:t>Mama-CEO · Säule 3 · Lektion 3.4</a:t>
+            </a:r>
+          </a:p>
+        </p:txBody>
+      </p:sp>
+      <p:sp>
+        <p:nvSpPr>
+          <p:cNvPr id="5" name="TextBox 4"/>
+          <p:cNvSpPr txBox="1"/>
+          <p:nvPr/>
+        </p:nvSpPr>
+        <p:spPr>
+          <a:xfrm>
+            <a:off x="6400800" y="4754880"/>
+            <a:ext cx="2286000" cy="274320"/>
+          </a:xfrm>
+          <a:prstGeom prst="rect">
+            <a:avLst/>
+          </a:prstGeom>
+          <a:noFill/>
+        </p:spPr>
+        <p:txBody>
+          <a:bodyPr wrap="square" anchor="t" lIns="0" rIns="0" tIns="0" bIns="0">
+            <a:spAutoFit/>
+          </a:bodyPr>
+          <a:lstStyle/>
+          <a:p>
+            <a:pPr algn="r"/>
+            <a:r>
+              <a:rPr sz="900" b="0" i="0">
+                <a:solidFill>
+                  <a:srgbClr val="7A8A95"/>
                 </a:solidFill>
                 <a:latin typeface="Calibri"/>
               </a:rPr>
-              <a:t>📱  Sichtbarkeit / Content</a:t>
-            </a:r>
-          </a:p>
-          <a:p>
-            <a:pPr algn="l">
-              <a:spcBef>
-                <a:spcPts val="0"/>
-              </a:spcBef>
-              <a:spcAft>
-                <a:spcPts val="1400"/>
-              </a:spcAft>
-            </a:pPr>
-            <a:r>
-              <a:rPr sz="2100" b="0" i="0">
-                <a:solidFill>
-                  <a:srgbClr val="2A2A2A"/>
-                </a:solidFill>
-                <a:latin typeface="Calibri"/>
-              </a:rPr>
-              <a:t>💬  Kundenbetreuung</a:t>
-            </a:r>
-          </a:p>
-          <a:p>
-            <a:pPr algn="l">
-              <a:spcBef>
-                <a:spcPts val="0"/>
-              </a:spcBef>
-              <a:spcAft>
-                <a:spcPts val="1400"/>
-              </a:spcAft>
-            </a:pPr>
-            <a:r>
-              <a:rPr sz="2100" b="0" i="0">
-                <a:solidFill>
-                  <a:srgbClr val="2A2A2A"/>
-                </a:solidFill>
-                <a:latin typeface="Calibri"/>
-              </a:rPr>
-              <a:t>🧘  Me-Time</a:t>
-            </a:r>
-          </a:p>
-          <a:p>
-            <a:pPr algn="l">
-              <a:spcBef>
-                <a:spcPts val="0"/>
-              </a:spcBef>
-              <a:spcAft>
-                <a:spcPts val="1400"/>
-              </a:spcAft>
-            </a:pPr>
-            <a:r>
-              <a:rPr sz="2100" b="0" i="0">
-                <a:solidFill>
-                  <a:srgbClr val="2A2A2A"/>
-                </a:solidFill>
-                <a:latin typeface="Calibri"/>
-              </a:rPr>
-              <a:t>👨‍👩‍👧‍👦  Familie + Haushalt</a:t>
-            </a:r>
-          </a:p>
-          <a:p>
-            <a:pPr algn="l">
-              <a:spcBef>
-                <a:spcPts val="0"/>
-              </a:spcBef>
-              <a:spcAft>
-                <a:spcPts val="1400"/>
-              </a:spcAft>
-            </a:pPr>
-            <a:r>
-              <a:rPr sz="2100" b="0" i="0">
-                <a:solidFill>
-                  <a:srgbClr val="2A2A2A"/>
-                </a:solidFill>
-                <a:latin typeface="Calibri"/>
-              </a:rPr>
-              <a:t>📊  Reflexion</a:t>
+              <a:t>Mum Life Balance</a:t>
             </a:r>
           </a:p>
         </p:txBody>
@@ -6143,20 +6618,263 @@
       <p:grpSpPr/>
       <p:sp>
         <p:nvSpPr>
-          <p:cNvPr id="2" name="Rectangle 1"/>
+          <p:cNvPr id="2" name="TextBox 1"/>
+          <p:cNvSpPr txBox="1"/>
+          <p:nvPr/>
+        </p:nvSpPr>
+        <p:spPr>
+          <a:xfrm>
+            <a:off x="548640" y="457200"/>
+            <a:ext cx="8046720" cy="914400"/>
+          </a:xfrm>
+          <a:prstGeom prst="rect">
+            <a:avLst/>
+          </a:prstGeom>
+          <a:noFill/>
+        </p:spPr>
+        <p:txBody>
+          <a:bodyPr wrap="square" anchor="t" lIns="0" rIns="0" tIns="0" bIns="0">
+            <a:spAutoFit/>
+          </a:bodyPr>
+          <a:lstStyle/>
+          <a:p>
+            <a:r>
+              <a:rPr sz="3000" b="1" i="0">
+                <a:solidFill>
+                  <a:srgbClr val="1A3A4A"/>
+                </a:solidFill>
+                <a:latin typeface="Georgia"/>
+              </a:rPr>
+              <a:t>Bereiche treffen deine Power-Slots</a:t>
+            </a:r>
+          </a:p>
+        </p:txBody>
+      </p:sp>
+      <p:sp>
+        <p:nvSpPr>
+          <p:cNvPr id="3" name="TextBox 2"/>
+          <p:cNvSpPr txBox="1"/>
+          <p:nvPr/>
+        </p:nvSpPr>
+        <p:spPr>
+          <a:xfrm>
+            <a:off x="548640" y="1417320"/>
+            <a:ext cx="8046720" cy="3154680"/>
+          </a:xfrm>
+          <a:prstGeom prst="rect">
+            <a:avLst/>
+          </a:prstGeom>
+          <a:noFill/>
+        </p:spPr>
+        <p:txBody>
+          <a:bodyPr wrap="square" anchor="t" lIns="0" rIns="0" tIns="0" bIns="0">
+            <a:spAutoFit/>
+          </a:bodyPr>
+          <a:lstStyle/>
+          <a:p>
+            <a:pPr>
+              <a:spcBef>
+                <a:spcPts val="0"/>
+              </a:spcBef>
+              <a:spcAft>
+                <a:spcPts val="1000"/>
+              </a:spcAft>
+            </a:pPr>
+            <a:r>
+              <a:rPr sz="2100" b="1" i="0">
+                <a:solidFill>
+                  <a:srgbClr val="1A3A4A"/>
+                </a:solidFill>
+                <a:latin typeface="Georgia"/>
+              </a:rPr>
+              <a:t>Nimm DEINE Slots — kein erfundenes Idealbild.</a:t>
+            </a:r>
+          </a:p>
+          <a:p>
+            <a:pPr>
+              <a:spcBef>
+                <a:spcPts val="0"/>
+              </a:spcBef>
+              <a:spcAft>
+                <a:spcPts val="900"/>
+              </a:spcAft>
+            </a:pPr>
+            <a:r>
+              <a:rPr sz="1600" b="0" i="0">
+                <a:solidFill>
+                  <a:srgbClr val="2C3E50"/>
+                </a:solidFill>
+                <a:latin typeface="Calibri"/>
+              </a:rPr>
+              <a:t>2 pro Tag · nur der Vormittag · oder 1 freier Nachmittag</a:t>
+            </a:r>
+          </a:p>
+          <a:p>
+            <a:pPr>
+              <a:spcBef>
+                <a:spcPts val="0"/>
+              </a:spcBef>
+              <a:spcAft>
+                <a:spcPts val="800"/>
+              </a:spcAft>
+            </a:pPr>
+            <a:r>
+              <a:rPr sz="1400" b="0" i="1">
+                <a:solidFill>
+                  <a:srgbClr val="7A8A95"/>
+                </a:solidFill>
+                <a:latin typeface="Calibri"/>
+              </a:rPr>
+              <a:t>In jeden Slot 1 Bereich → du weisst nicht nur DASS, sondern WORAN du arbeitest.</a:t>
+            </a:r>
+          </a:p>
+        </p:txBody>
+      </p:sp>
+      <p:sp>
+        <p:nvSpPr>
+          <p:cNvPr id="4" name="TextBox 3"/>
+          <p:cNvSpPr txBox="1"/>
+          <p:nvPr/>
+        </p:nvSpPr>
+        <p:spPr>
+          <a:xfrm>
+            <a:off x="457200" y="4754880"/>
+            <a:ext cx="5486400" cy="274320"/>
+          </a:xfrm>
+          <a:prstGeom prst="rect">
+            <a:avLst/>
+          </a:prstGeom>
+          <a:noFill/>
+        </p:spPr>
+        <p:txBody>
+          <a:bodyPr wrap="square" anchor="t" lIns="0" rIns="0" tIns="0" bIns="0">
+            <a:spAutoFit/>
+          </a:bodyPr>
+          <a:lstStyle/>
+          <a:p>
+            <a:r>
+              <a:rPr sz="900" b="0" i="0">
+                <a:solidFill>
+                  <a:srgbClr val="7A8A95"/>
+                </a:solidFill>
+                <a:latin typeface="Calibri"/>
+              </a:rPr>
+              <a:t>Mama-CEO · Säule 3 · Lektion 3.4</a:t>
+            </a:r>
+          </a:p>
+        </p:txBody>
+      </p:sp>
+      <p:sp>
+        <p:nvSpPr>
+          <p:cNvPr id="5" name="TextBox 4"/>
+          <p:cNvSpPr txBox="1"/>
+          <p:nvPr/>
+        </p:nvSpPr>
+        <p:spPr>
+          <a:xfrm>
+            <a:off x="6400800" y="4754880"/>
+            <a:ext cx="2286000" cy="274320"/>
+          </a:xfrm>
+          <a:prstGeom prst="rect">
+            <a:avLst/>
+          </a:prstGeom>
+          <a:noFill/>
+        </p:spPr>
+        <p:txBody>
+          <a:bodyPr wrap="square" anchor="t" lIns="0" rIns="0" tIns="0" bIns="0">
+            <a:spAutoFit/>
+          </a:bodyPr>
+          <a:lstStyle/>
+          <a:p>
+            <a:pPr algn="r"/>
+            <a:r>
+              <a:rPr sz="900" b="0" i="0">
+                <a:solidFill>
+                  <a:srgbClr val="7A8A95"/>
+                </a:solidFill>
+                <a:latin typeface="Calibri"/>
+              </a:rPr>
+              <a:t>Mum Life Balance</a:t>
+            </a:r>
+          </a:p>
+        </p:txBody>
+      </p:sp>
+    </p:spTree>
+  </p:cSld>
+  <p:clrMapOvr>
+    <a:masterClrMapping/>
+  </p:clrMapOvr>
+</p:sld>
+</file>
+
+<file path=ppt/slides/slide7.xml><?xml version="1.0" encoding="utf-8"?>
+<p:sld xmlns:a="http://schemas.openxmlformats.org/drawingml/2006/main" xmlns:p="http://schemas.openxmlformats.org/presentationml/2006/main" xmlns:r="http://schemas.openxmlformats.org/officeDocument/2006/relationships">
+  <p:cSld>
+    <p:bg>
+      <p:bgPr>
+        <a:solidFill>
+          <a:srgbClr val="12828C"/>
+        </a:solidFill>
+        <a:effectLst/>
+      </p:bgPr>
+    </p:bg>
+    <p:spTree>
+      <p:nvGrpSpPr>
+        <p:cNvPr id="1" name=""/>
+        <p:cNvGrpSpPr/>
+        <p:nvPr/>
+      </p:nvGrpSpPr>
+      <p:grpSpPr/>
+      <p:sp>
+        <p:nvSpPr>
+          <p:cNvPr id="2" name="TextBox 1"/>
+          <p:cNvSpPr txBox="1"/>
+          <p:nvPr/>
+        </p:nvSpPr>
+        <p:spPr>
+          <a:xfrm>
+            <a:off x="548640" y="1097280"/>
+            <a:ext cx="8046720" cy="365760"/>
+          </a:xfrm>
+          <a:prstGeom prst="rect">
+            <a:avLst/>
+          </a:prstGeom>
+          <a:noFill/>
+        </p:spPr>
+        <p:txBody>
+          <a:bodyPr wrap="square" anchor="t" lIns="0" rIns="0" tIns="0" bIns="0">
+            <a:spAutoFit/>
+          </a:bodyPr>
+          <a:lstStyle/>
+          <a:p>
+            <a:r>
+              <a:rPr sz="1100" b="1" i="0">
+                <a:solidFill>
+                  <a:srgbClr val="DC822E"/>
+                </a:solidFill>
+                <a:latin typeface="Calibri"/>
+              </a:rPr>
+              <a:t>VOM BEREICH ZUR AUFGABE</a:t>
+            </a:r>
+          </a:p>
+        </p:txBody>
+      </p:sp>
+      <p:sp>
+        <p:nvSpPr>
+          <p:cNvPr id="3" name="Rectangle 2"/>
           <p:cNvSpPr/>
           <p:nvPr/>
         </p:nvSpPr>
         <p:spPr>
           <a:xfrm>
-            <a:off x="548640" y="502920"/>
-            <a:ext cx="201168" cy="201168"/>
+            <a:off x="548640" y="1554480"/>
+            <a:ext cx="548640" cy="45720"/>
           </a:xfrm>
           <a:prstGeom prst="rect">
             <a:avLst/>
           </a:prstGeom>
           <a:solidFill>
-            <a:srgbClr val="1F6F6B"/>
+            <a:srgbClr val="DC822E"/>
           </a:solidFill>
           <a:ln>
             <a:noFill/>
@@ -6187,14 +6905,14 @@
       </p:sp>
       <p:sp>
         <p:nvSpPr>
-          <p:cNvPr id="3" name="TextBox 2"/>
+          <p:cNvPr id="4" name="TextBox 3"/>
           <p:cNvSpPr txBox="1"/>
           <p:nvPr/>
         </p:nvSpPr>
         <p:spPr>
           <a:xfrm>
-            <a:off x="868680" y="457200"/>
-            <a:ext cx="10424160" cy="1005840"/>
+            <a:off x="548640" y="1920240"/>
+            <a:ext cx="8046720" cy="2194560"/>
           </a:xfrm>
           <a:prstGeom prst="rect">
             <a:avLst/>
@@ -6207,36 +6925,28 @@
           </a:bodyPr>
           <a:lstStyle/>
           <a:p>
-            <a:pPr algn="l">
-              <a:spcBef>
-                <a:spcPts val="0"/>
-              </a:spcBef>
-              <a:spcAft>
-                <a:spcPts val="1000"/>
-              </a:spcAft>
-            </a:pPr>
-            <a:r>
-              <a:rPr sz="3200" b="1" i="0">
-                <a:solidFill>
-                  <a:srgbClr val="1F6F6B"/>
+            <a:r>
+              <a:rPr sz="2800" b="1" i="0">
+                <a:solidFill>
+                  <a:srgbClr val="F1ECDD"/>
                 </a:solidFill>
                 <a:latin typeface="Georgia"/>
               </a:rPr>
-              <a:t>Bereiche treffen deine Power-Slots</a:t>
-            </a:r>
-          </a:p>
-        </p:txBody>
-      </p:sp>
-      <p:sp>
-        <p:nvSpPr>
-          <p:cNvPr id="4" name="TextBox 3"/>
+              <a:t>Bereich = die Schublade. Aufgabe = der Inhalt.</a:t>
+            </a:r>
+          </a:p>
+        </p:txBody>
+      </p:sp>
+      <p:sp>
+        <p:nvSpPr>
+          <p:cNvPr id="5" name="TextBox 4"/>
           <p:cNvSpPr txBox="1"/>
           <p:nvPr/>
         </p:nvSpPr>
         <p:spPr>
           <a:xfrm>
-            <a:off x="868680" y="1783080"/>
-            <a:ext cx="10424160" cy="4572000"/>
+            <a:off x="548640" y="3703320"/>
+            <a:ext cx="8046720" cy="731520"/>
           </a:xfrm>
           <a:prstGeom prst="rect">
             <a:avLst/>
@@ -6249,144 +6959,28 @@
           </a:bodyPr>
           <a:lstStyle/>
           <a:p>
-            <a:pPr algn="l">
-              <a:spcBef>
-                <a:spcPts val="0"/>
-              </a:spcBef>
-              <a:spcAft>
-                <a:spcPts val="1400"/>
-              </a:spcAft>
-            </a:pPr>
-            <a:r>
-              <a:rPr sz="2600" b="1" i="0">
-                <a:solidFill>
-                  <a:srgbClr val="2A2A2A"/>
-                </a:solidFill>
-                <a:latin typeface="Georgia"/>
-              </a:rPr>
-              <a:t>Nimm DEINE Slots — kein erfundenes Idealbild.</a:t>
-            </a:r>
-          </a:p>
-          <a:p>
-            <a:pPr algn="l">
-              <a:spcBef>
-                <a:spcPts val="0"/>
-              </a:spcBef>
-              <a:spcAft>
-                <a:spcPts val="1400"/>
-              </a:spcAft>
-            </a:pPr>
-            <a:r>
-              <a:rPr sz="2100" b="0" i="0">
-                <a:solidFill>
-                  <a:srgbClr val="2A2A2A"/>
+            <a:r>
+              <a:rPr sz="1500" b="0" i="1">
+                <a:solidFill>
+                  <a:srgbClr val="F1ECDD"/>
                 </a:solidFill>
                 <a:latin typeface="Calibri"/>
               </a:rPr>
-              <a:t>2 pro Tag · nur der Vormittag · oder 1 freier Nachmittag</a:t>
-            </a:r>
-          </a:p>
-          <a:p>
-            <a:pPr algn="l">
-              <a:spcBef>
-                <a:spcPts val="0"/>
-              </a:spcBef>
-              <a:spcAft>
-                <a:spcPts val="1400"/>
-              </a:spcAft>
-            </a:pPr>
-            <a:r>
-              <a:rPr sz="2000" b="0" i="1">
-                <a:solidFill>
-                  <a:srgbClr val="6E6E6E"/>
-                </a:solidFill>
-                <a:latin typeface="Calibri"/>
-              </a:rPr>
-              <a:t>In jeden Slot 1 Lebens-Bereich → du weisst nicht nur DASS, sondern WORAN du arbeitest.</a:t>
-            </a:r>
-          </a:p>
-        </p:txBody>
-      </p:sp>
-    </p:spTree>
-  </p:cSld>
-  <p:clrMapOvr>
-    <a:masterClrMapping/>
-  </p:clrMapOvr>
-</p:sld>
-</file>
-
-<file path=ppt/slides/slide7.xml><?xml version="1.0" encoding="utf-8"?>
-<p:sld xmlns:a="http://schemas.openxmlformats.org/drawingml/2006/main" xmlns:p="http://schemas.openxmlformats.org/presentationml/2006/main" xmlns:r="http://schemas.openxmlformats.org/officeDocument/2006/relationships">
-  <p:cSld>
-    <p:bg>
-      <p:bgPr>
-        <a:solidFill>
-          <a:srgbClr val="FFFFFF"/>
-        </a:solidFill>
-        <a:effectLst/>
-      </p:bgPr>
-    </p:bg>
-    <p:spTree>
-      <p:nvGrpSpPr>
-        <p:cNvPr id="1" name=""/>
-        <p:cNvGrpSpPr/>
-        <p:nvPr/>
-      </p:nvGrpSpPr>
-      <p:grpSpPr/>
-      <p:sp>
-        <p:nvSpPr>
-          <p:cNvPr id="2" name="Rectangle 1"/>
-          <p:cNvSpPr/>
-          <p:nvPr/>
-        </p:nvSpPr>
-        <p:spPr>
-          <a:xfrm>
-            <a:off x="548640" y="502920"/>
-            <a:ext cx="201168" cy="201168"/>
-          </a:xfrm>
-          <a:prstGeom prst="rect">
-            <a:avLst/>
-          </a:prstGeom>
-          <a:solidFill>
-            <a:srgbClr val="1F6F6B"/>
-          </a:solidFill>
-          <a:ln>
-            <a:noFill/>
-          </a:ln>
-          <a:effectLst/>
-        </p:spPr>
-        <p:style>
-          <a:lnRef idx="1">
-            <a:schemeClr val="accent1"/>
-          </a:lnRef>
-          <a:fillRef idx="3">
-            <a:schemeClr val="accent1"/>
-          </a:fillRef>
-          <a:effectRef idx="2">
-            <a:schemeClr val="accent1"/>
-          </a:effectRef>
-          <a:fontRef idx="minor">
-            <a:schemeClr val="lt1"/>
-          </a:fontRef>
-        </p:style>
-        <p:txBody>
-          <a:bodyPr rtlCol="0" anchor="ctr"/>
-          <a:lstStyle/>
-          <a:p>
-            <a:pPr algn="ctr"/>
-          </a:p>
-        </p:txBody>
-      </p:sp>
-      <p:sp>
-        <p:nvSpPr>
-          <p:cNvPr id="3" name="TextBox 2"/>
+              <a:t>Mo Vormittag = Produkterstellung = „Modul 2 aufnehmen“. Wie beim Haushalt: Di = Bad, Mi = Küche.</a:t>
+            </a:r>
+          </a:p>
+        </p:txBody>
+      </p:sp>
+      <p:sp>
+        <p:nvSpPr>
+          <p:cNvPr id="6" name="TextBox 5"/>
           <p:cNvSpPr txBox="1"/>
           <p:nvPr/>
         </p:nvSpPr>
         <p:spPr>
           <a:xfrm>
-            <a:off x="868680" y="457200"/>
-            <a:ext cx="10424160" cy="1005840"/>
+            <a:off x="457200" y="4754880"/>
+            <a:ext cx="5486400" cy="274320"/>
           </a:xfrm>
           <a:prstGeom prst="rect">
             <a:avLst/>
@@ -6399,36 +6993,28 @@
           </a:bodyPr>
           <a:lstStyle/>
           <a:p>
-            <a:pPr algn="l">
-              <a:spcBef>
-                <a:spcPts val="0"/>
-              </a:spcBef>
-              <a:spcAft>
-                <a:spcPts val="1000"/>
-              </a:spcAft>
-            </a:pPr>
-            <a:r>
-              <a:rPr sz="3200" b="1" i="0">
-                <a:solidFill>
-                  <a:srgbClr val="1F6F6B"/>
-                </a:solidFill>
-                <a:latin typeface="Georgia"/>
-              </a:rPr>
-              <a:t>Vom Bereich zur konkreten Aufgabe</a:t>
-            </a:r>
-          </a:p>
-        </p:txBody>
-      </p:sp>
-      <p:sp>
-        <p:nvSpPr>
-          <p:cNvPr id="4" name="TextBox 3"/>
+            <a:r>
+              <a:rPr sz="900" b="0" i="0">
+                <a:solidFill>
+                  <a:srgbClr val="F1ECDD"/>
+                </a:solidFill>
+                <a:latin typeface="Calibri"/>
+              </a:rPr>
+              <a:t>Mama-CEO · Säule 3 · Lektion 3.4</a:t>
+            </a:r>
+          </a:p>
+        </p:txBody>
+      </p:sp>
+      <p:sp>
+        <p:nvSpPr>
+          <p:cNvPr id="7" name="TextBox 6"/>
           <p:cNvSpPr txBox="1"/>
           <p:nvPr/>
         </p:nvSpPr>
         <p:spPr>
           <a:xfrm>
-            <a:off x="868680" y="1783080"/>
-            <a:ext cx="10424160" cy="4572000"/>
+            <a:off x="6400800" y="4754880"/>
+            <a:ext cx="2286000" cy="274320"/>
           </a:xfrm>
           <a:prstGeom prst="rect">
             <a:avLst/>
@@ -6441,60 +7027,15 @@
           </a:bodyPr>
           <a:lstStyle/>
           <a:p>
-            <a:pPr algn="l">
-              <a:spcBef>
-                <a:spcPts val="0"/>
-              </a:spcBef>
-              <a:spcAft>
-                <a:spcPts val="1400"/>
-              </a:spcAft>
-            </a:pPr>
-            <a:r>
-              <a:rPr sz="2600" b="1" i="0">
-                <a:solidFill>
-                  <a:srgbClr val="2A2A2A"/>
-                </a:solidFill>
-                <a:latin typeface="Georgia"/>
-              </a:rPr>
-              <a:t>Bereich = die Schublade. Aufgabe = der Inhalt.</a:t>
-            </a:r>
-          </a:p>
-          <a:p>
-            <a:pPr algn="l">
-              <a:spcBef>
-                <a:spcPts val="0"/>
-              </a:spcBef>
-              <a:spcAft>
-                <a:spcPts val="1400"/>
-              </a:spcAft>
-            </a:pPr>
-            <a:r>
-              <a:rPr sz="2100" b="0" i="0">
-                <a:solidFill>
-                  <a:srgbClr val="2A2A2A"/>
+            <a:pPr algn="r"/>
+            <a:r>
+              <a:rPr sz="900" b="0" i="0">
+                <a:solidFill>
+                  <a:srgbClr val="F1ECDD"/>
                 </a:solidFill>
                 <a:latin typeface="Calibri"/>
               </a:rPr>
-              <a:t>Mo Vormittag = Produkterstellung = „Modul 2 aufnehmen“</a:t>
-            </a:r>
-          </a:p>
-          <a:p>
-            <a:pPr algn="l">
-              <a:spcBef>
-                <a:spcPts val="0"/>
-              </a:spcBef>
-              <a:spcAft>
-                <a:spcPts val="1400"/>
-              </a:spcAft>
-            </a:pPr>
-            <a:r>
-              <a:rPr sz="2000" b="0" i="1">
-                <a:solidFill>
-                  <a:srgbClr val="6E6E6E"/>
-                </a:solidFill>
-                <a:latin typeface="Calibri"/>
-              </a:rPr>
-              <a:t>Wie beim Haushalt: Dienstag ist Bad, Mittwoch ist Küche.</a:t>
+              <a:t>Mum Life Balance</a:t>
             </a:r>
           </a:p>
         </p:txBody>
@@ -6527,58 +7068,14 @@
       <p:grpSpPr/>
       <p:sp>
         <p:nvSpPr>
-          <p:cNvPr id="2" name="Rectangle 1"/>
-          <p:cNvSpPr/>
-          <p:nvPr/>
-        </p:nvSpPr>
-        <p:spPr>
-          <a:xfrm>
-            <a:off x="548640" y="502920"/>
-            <a:ext cx="201168" cy="201168"/>
-          </a:xfrm>
-          <a:prstGeom prst="rect">
-            <a:avLst/>
-          </a:prstGeom>
-          <a:solidFill>
-            <a:srgbClr val="1F6F6B"/>
-          </a:solidFill>
-          <a:ln>
-            <a:noFill/>
-          </a:ln>
-          <a:effectLst/>
-        </p:spPr>
-        <p:style>
-          <a:lnRef idx="1">
-            <a:schemeClr val="accent1"/>
-          </a:lnRef>
-          <a:fillRef idx="3">
-            <a:schemeClr val="accent1"/>
-          </a:fillRef>
-          <a:effectRef idx="2">
-            <a:schemeClr val="accent1"/>
-          </a:effectRef>
-          <a:fontRef idx="minor">
-            <a:schemeClr val="lt1"/>
-          </a:fontRef>
-        </p:style>
-        <p:txBody>
-          <a:bodyPr rtlCol="0" anchor="ctr"/>
-          <a:lstStyle/>
-          <a:p>
-            <a:pPr algn="ctr"/>
-          </a:p>
-        </p:txBody>
-      </p:sp>
-      <p:sp>
-        <p:nvSpPr>
-          <p:cNvPr id="3" name="TextBox 2"/>
+          <p:cNvPr id="2" name="TextBox 1"/>
           <p:cNvSpPr txBox="1"/>
           <p:nvPr/>
         </p:nvSpPr>
         <p:spPr>
           <a:xfrm>
-            <a:off x="868680" y="457200"/>
-            <a:ext cx="10424160" cy="1005840"/>
+            <a:off x="548640" y="457200"/>
+            <a:ext cx="8046720" cy="914400"/>
           </a:xfrm>
           <a:prstGeom prst="rect">
             <a:avLst/>
@@ -6591,22 +7088,168 @@
           </a:bodyPr>
           <a:lstStyle/>
           <a:p>
-            <a:pPr algn="l">
+            <a:r>
+              <a:rPr sz="3000" b="1" i="0">
+                <a:solidFill>
+                  <a:srgbClr val="1A3A4A"/>
+                </a:solidFill>
+                <a:latin typeface="Georgia"/>
+              </a:rPr>
+              <a:t>Der CEO-Tag-Fokus gibt die Richtung</a:t>
+            </a:r>
+          </a:p>
+        </p:txBody>
+      </p:sp>
+      <p:sp>
+        <p:nvSpPr>
+          <p:cNvPr id="3" name="TextBox 2"/>
+          <p:cNvSpPr txBox="1"/>
+          <p:nvPr/>
+        </p:nvSpPr>
+        <p:spPr>
+          <a:xfrm>
+            <a:off x="548640" y="1417320"/>
+            <a:ext cx="8046720" cy="3154680"/>
+          </a:xfrm>
+          <a:prstGeom prst="rect">
+            <a:avLst/>
+          </a:prstGeom>
+          <a:noFill/>
+        </p:spPr>
+        <p:txBody>
+          <a:bodyPr wrap="square" anchor="t" lIns="0" rIns="0" tIns="0" bIns="0">
+            <a:spAutoFit/>
+          </a:bodyPr>
+          <a:lstStyle/>
+          <a:p>
+            <a:pPr>
               <a:spcBef>
                 <a:spcPts val="0"/>
               </a:spcBef>
               <a:spcAft>
-                <a:spcPts val="1000"/>
+                <a:spcPts val="900"/>
               </a:spcAft>
             </a:pPr>
             <a:r>
-              <a:rPr sz="3200" b="1" i="0">
-                <a:solidFill>
-                  <a:srgbClr val="1F6F6B"/>
-                </a:solidFill>
-                <a:latin typeface="Georgia"/>
-              </a:rPr>
-              <a:t>Der CEO-Tag-Fokus gibt die Richtung</a:t>
+              <a:rPr sz="1600" b="1" i="0">
+                <a:solidFill>
+                  <a:srgbClr val="DC822E"/>
+                </a:solidFill>
+                <a:latin typeface="Calibri"/>
+              </a:rPr>
+              <a:t>▪  </a:t>
+            </a:r>
+            <a:r>
+              <a:rPr sz="1600" b="0" i="0">
+                <a:solidFill>
+                  <a:srgbClr val="2C3E50"/>
+                </a:solidFill>
+                <a:latin typeface="Calibri"/>
+              </a:rPr>
+              <a:t>Mo Strategie → Produkterstellung</a:t>
+            </a:r>
+          </a:p>
+          <a:p>
+            <a:pPr>
+              <a:spcBef>
+                <a:spcPts val="0"/>
+              </a:spcBef>
+              <a:spcAft>
+                <a:spcPts val="900"/>
+              </a:spcAft>
+            </a:pPr>
+            <a:r>
+              <a:rPr sz="1600" b="1" i="0">
+                <a:solidFill>
+                  <a:srgbClr val="DC822E"/>
+                </a:solidFill>
+                <a:latin typeface="Calibri"/>
+              </a:rPr>
+              <a:t>▪  </a:t>
+            </a:r>
+            <a:r>
+              <a:rPr sz="1600" b="0" i="0">
+                <a:solidFill>
+                  <a:srgbClr val="2C3E50"/>
+                </a:solidFill>
+                <a:latin typeface="Calibri"/>
+              </a:rPr>
+              <a:t>Di Brand → Sichtbarkeit</a:t>
+            </a:r>
+          </a:p>
+          <a:p>
+            <a:pPr>
+              <a:spcBef>
+                <a:spcPts val="0"/>
+              </a:spcBef>
+              <a:spcAft>
+                <a:spcPts val="900"/>
+              </a:spcAft>
+            </a:pPr>
+            <a:r>
+              <a:rPr sz="1600" b="1" i="0">
+                <a:solidFill>
+                  <a:srgbClr val="DC822E"/>
+                </a:solidFill>
+                <a:latin typeface="Calibri"/>
+              </a:rPr>
+              <a:t>▪  </a:t>
+            </a:r>
+            <a:r>
+              <a:rPr sz="1600" b="0" i="0">
+                <a:solidFill>
+                  <a:srgbClr val="2C3E50"/>
+                </a:solidFill>
+                <a:latin typeface="Calibri"/>
+              </a:rPr>
+              <a:t>Mi Beziehungen → Kundenbetreuung</a:t>
+            </a:r>
+          </a:p>
+          <a:p>
+            <a:pPr>
+              <a:spcBef>
+                <a:spcPts val="0"/>
+              </a:spcBef>
+              <a:spcAft>
+                <a:spcPts val="900"/>
+              </a:spcAft>
+            </a:pPr>
+            <a:r>
+              <a:rPr sz="1600" b="1" i="0">
+                <a:solidFill>
+                  <a:srgbClr val="DC822E"/>
+                </a:solidFill>
+                <a:latin typeface="Calibri"/>
+              </a:rPr>
+              <a:t>▪  </a:t>
+            </a:r>
+            <a:r>
+              <a:rPr sz="1600" b="0" i="0">
+                <a:solidFill>
+                  <a:srgbClr val="2C3E50"/>
+                </a:solidFill>
+                <a:latin typeface="Calibri"/>
+              </a:rPr>
+              <a:t>Fr Reflexion → Reflexion</a:t>
+            </a:r>
+          </a:p>
+          <a:p>
+            <a:pPr>
+              <a:spcBef>
+                <a:spcPts val="0"/>
+              </a:spcBef>
+              <a:spcAft>
+                <a:spcPts val="800"/>
+              </a:spcAft>
+            </a:pPr>
+            <a:r>
+              <a:rPr sz="1400" b="0" i="1">
+                <a:solidFill>
+                  <a:srgbClr val="7A8A95"/>
+                </a:solidFill>
+                <a:latin typeface="Calibri"/>
+              </a:rPr>
+              <a:t>Der Tag-Fokus gibt die Richtung, die Bereiche füllen sie konkret.</a:t>
             </a:r>
           </a:p>
         </p:txBody>
@@ -6619,8 +7262,8 @@
         </p:nvSpPr>
         <p:spPr>
           <a:xfrm>
-            <a:off x="868680" y="1783080"/>
-            <a:ext cx="10424160" cy="4572000"/>
+            <a:off x="457200" y="4754880"/>
+            <a:ext cx="5486400" cy="274320"/>
           </a:xfrm>
           <a:prstGeom prst="rect">
             <a:avLst/>
@@ -6633,98 +7276,49 @@
           </a:bodyPr>
           <a:lstStyle/>
           <a:p>
-            <a:pPr algn="l">
-              <a:spcBef>
-                <a:spcPts val="0"/>
-              </a:spcBef>
-              <a:spcAft>
-                <a:spcPts val="1400"/>
-              </a:spcAft>
-            </a:pPr>
-            <a:r>
-              <a:rPr sz="2100" b="0" i="0">
-                <a:solidFill>
-                  <a:srgbClr val="2A2A2A"/>
+            <a:r>
+              <a:rPr sz="900" b="0" i="0">
+                <a:solidFill>
+                  <a:srgbClr val="7A8A95"/>
                 </a:solidFill>
                 <a:latin typeface="Calibri"/>
               </a:rPr>
-              <a:t>Mo Strategie → Produkterstellung</a:t>
-            </a:r>
-          </a:p>
-          <a:p>
-            <a:pPr algn="l">
-              <a:spcBef>
-                <a:spcPts val="0"/>
-              </a:spcBef>
-              <a:spcAft>
-                <a:spcPts val="1400"/>
-              </a:spcAft>
-            </a:pPr>
-            <a:r>
-              <a:rPr sz="2100" b="0" i="0">
-                <a:solidFill>
-                  <a:srgbClr val="2A2A2A"/>
+              <a:t>Mama-CEO · Säule 3 · Lektion 3.4</a:t>
+            </a:r>
+          </a:p>
+        </p:txBody>
+      </p:sp>
+      <p:sp>
+        <p:nvSpPr>
+          <p:cNvPr id="5" name="TextBox 4"/>
+          <p:cNvSpPr txBox="1"/>
+          <p:nvPr/>
+        </p:nvSpPr>
+        <p:spPr>
+          <a:xfrm>
+            <a:off x="6400800" y="4754880"/>
+            <a:ext cx="2286000" cy="274320"/>
+          </a:xfrm>
+          <a:prstGeom prst="rect">
+            <a:avLst/>
+          </a:prstGeom>
+          <a:noFill/>
+        </p:spPr>
+        <p:txBody>
+          <a:bodyPr wrap="square" anchor="t" lIns="0" rIns="0" tIns="0" bIns="0">
+            <a:spAutoFit/>
+          </a:bodyPr>
+          <a:lstStyle/>
+          <a:p>
+            <a:pPr algn="r"/>
+            <a:r>
+              <a:rPr sz="900" b="0" i="0">
+                <a:solidFill>
+                  <a:srgbClr val="7A8A95"/>
                 </a:solidFill>
                 <a:latin typeface="Calibri"/>
               </a:rPr>
-              <a:t>Di Brand → Sichtbarkeit</a:t>
-            </a:r>
-          </a:p>
-          <a:p>
-            <a:pPr algn="l">
-              <a:spcBef>
-                <a:spcPts val="0"/>
-              </a:spcBef>
-              <a:spcAft>
-                <a:spcPts val="1400"/>
-              </a:spcAft>
-            </a:pPr>
-            <a:r>
-              <a:rPr sz="2100" b="0" i="0">
-                <a:solidFill>
-                  <a:srgbClr val="2A2A2A"/>
-                </a:solidFill>
-                <a:latin typeface="Calibri"/>
-              </a:rPr>
-              <a:t>Mi Beziehungen → Kundenbetreuung</a:t>
-            </a:r>
-          </a:p>
-          <a:p>
-            <a:pPr algn="l">
-              <a:spcBef>
-                <a:spcPts val="0"/>
-              </a:spcBef>
-              <a:spcAft>
-                <a:spcPts val="1400"/>
-              </a:spcAft>
-            </a:pPr>
-            <a:r>
-              <a:rPr sz="2100" b="0" i="0">
-                <a:solidFill>
-                  <a:srgbClr val="2A2A2A"/>
-                </a:solidFill>
-                <a:latin typeface="Calibri"/>
-              </a:rPr>
-              <a:t>Fr Reflexion → Reflexion</a:t>
-            </a:r>
-          </a:p>
-          <a:p>
-            <a:pPr algn="l">
-              <a:spcBef>
-                <a:spcPts val="0"/>
-              </a:spcBef>
-              <a:spcAft>
-                <a:spcPts val="1400"/>
-              </a:spcAft>
-            </a:pPr>
-            <a:r>
-              <a:rPr sz="2000" b="0" i="1">
-                <a:solidFill>
-                  <a:srgbClr val="6E6E6E"/>
-                </a:solidFill>
-                <a:latin typeface="Calibri"/>
-              </a:rPr>
-              <a:t>Der Tag-Fokus gibt die Richtung, die Bereiche füllen sie konkret.</a:t>
+              <a:t>Mum Life Balance</a:t>
             </a:r>
           </a:p>
         </p:txBody>
@@ -6757,58 +7351,14 @@
       <p:grpSpPr/>
       <p:sp>
         <p:nvSpPr>
-          <p:cNvPr id="2" name="Rectangle 1"/>
-          <p:cNvSpPr/>
-          <p:nvPr/>
-        </p:nvSpPr>
-        <p:spPr>
-          <a:xfrm>
-            <a:off x="548640" y="502920"/>
-            <a:ext cx="201168" cy="201168"/>
-          </a:xfrm>
-          <a:prstGeom prst="rect">
-            <a:avLst/>
-          </a:prstGeom>
-          <a:solidFill>
-            <a:srgbClr val="1F6F6B"/>
-          </a:solidFill>
-          <a:ln>
-            <a:noFill/>
-          </a:ln>
-          <a:effectLst/>
-        </p:spPr>
-        <p:style>
-          <a:lnRef idx="1">
-            <a:schemeClr val="accent1"/>
-          </a:lnRef>
-          <a:fillRef idx="3">
-            <a:schemeClr val="accent1"/>
-          </a:fillRef>
-          <a:effectRef idx="2">
-            <a:schemeClr val="accent1"/>
-          </a:effectRef>
-          <a:fontRef idx="minor">
-            <a:schemeClr val="lt1"/>
-          </a:fontRef>
-        </p:style>
-        <p:txBody>
-          <a:bodyPr rtlCol="0" anchor="ctr"/>
-          <a:lstStyle/>
-          <a:p>
-            <a:pPr algn="ctr"/>
-          </a:p>
-        </p:txBody>
-      </p:sp>
-      <p:sp>
-        <p:nvSpPr>
-          <p:cNvPr id="3" name="TextBox 2"/>
+          <p:cNvPr id="2" name="TextBox 1"/>
           <p:cNvSpPr txBox="1"/>
           <p:nvPr/>
         </p:nvSpPr>
         <p:spPr>
           <a:xfrm>
-            <a:off x="868680" y="457200"/>
-            <a:ext cx="10424160" cy="1005840"/>
+            <a:off x="548640" y="457200"/>
+            <a:ext cx="8046720" cy="914400"/>
           </a:xfrm>
           <a:prstGeom prst="rect">
             <a:avLst/>
@@ -6821,7 +7371,41 @@
           </a:bodyPr>
           <a:lstStyle/>
           <a:p>
-            <a:pPr algn="l">
+            <a:r>
+              <a:rPr sz="3000" b="1" i="0">
+                <a:solidFill>
+                  <a:srgbClr val="1A3A4A"/>
+                </a:solidFill>
+                <a:latin typeface="Georgia"/>
+              </a:rPr>
+              <a:t>Welche Bereiche sind diesen Monat dran?</a:t>
+            </a:r>
+          </a:p>
+        </p:txBody>
+      </p:sp>
+      <p:sp>
+        <p:nvSpPr>
+          <p:cNvPr id="3" name="TextBox 2"/>
+          <p:cNvSpPr txBox="1"/>
+          <p:nvPr/>
+        </p:nvSpPr>
+        <p:spPr>
+          <a:xfrm>
+            <a:off x="548640" y="1417320"/>
+            <a:ext cx="8046720" cy="3154680"/>
+          </a:xfrm>
+          <a:prstGeom prst="rect">
+            <a:avLst/>
+          </a:prstGeom>
+          <a:noFill/>
+        </p:spPr>
+        <p:txBody>
+          <a:bodyPr wrap="square" anchor="t" lIns="0" rIns="0" tIns="0" bIns="0">
+            <a:spAutoFit/>
+          </a:bodyPr>
+          <a:lstStyle/>
+          <a:p>
+            <a:pPr>
               <a:spcBef>
                 <a:spcPts val="0"/>
               </a:spcBef>
@@ -6830,13 +7414,51 @@
               </a:spcAft>
             </a:pPr>
             <a:r>
-              <a:rPr sz="3200" b="1" i="0">
-                <a:solidFill>
-                  <a:srgbClr val="1F6F6B"/>
+              <a:rPr sz="2100" b="1" i="0">
+                <a:solidFill>
+                  <a:srgbClr val="1A3A4A"/>
                 </a:solidFill>
                 <a:latin typeface="Georgia"/>
               </a:rPr>
-              <a:t>Welche Bereiche sind diesen Monat dran?</a:t>
+              <a:t>Nicht alle 6 jede Woche — der Monat entscheidet.</a:t>
+            </a:r>
+          </a:p>
+          <a:p>
+            <a:pPr>
+              <a:spcBef>
+                <a:spcPts val="0"/>
+              </a:spcBef>
+              <a:spcAft>
+                <a:spcPts val="900"/>
+              </a:spcAft>
+            </a:pPr>
+            <a:r>
+              <a:rPr sz="1600" b="0" i="0">
+                <a:solidFill>
+                  <a:srgbClr val="2C3E50"/>
+                </a:solidFill>
+                <a:latin typeface="Calibri"/>
+              </a:rPr>
+              <a:t>Aber: Me-Time + Reflexion möglichst nie ganz raus.</a:t>
+            </a:r>
+          </a:p>
+          <a:p>
+            <a:pPr>
+              <a:spcBef>
+                <a:spcPts val="0"/>
+              </a:spcBef>
+              <a:spcAft>
+                <a:spcPts val="800"/>
+              </a:spcAft>
+            </a:pPr>
+            <a:r>
+              <a:rPr sz="1400" b="0" i="1">
+                <a:solidFill>
+                  <a:srgbClr val="7A8A95"/>
+                </a:solidFill>
+                <a:latin typeface="Calibri"/>
+              </a:rPr>
+              <a:t>Sonst landest du wieder im Hamsterrad aus Säule 2.</a:t>
             </a:r>
           </a:p>
         </p:txBody>
@@ -6849,8 +7471,8 @@
         </p:nvSpPr>
         <p:spPr>
           <a:xfrm>
-            <a:off x="868680" y="1783080"/>
-            <a:ext cx="10424160" cy="4572000"/>
+            <a:off x="457200" y="4754880"/>
+            <a:ext cx="5486400" cy="274320"/>
           </a:xfrm>
           <a:prstGeom prst="rect">
             <a:avLst/>
@@ -6863,60 +7485,49 @@
           </a:bodyPr>
           <a:lstStyle/>
           <a:p>
-            <a:pPr algn="l">
-              <a:spcBef>
-                <a:spcPts val="0"/>
-              </a:spcBef>
-              <a:spcAft>
-                <a:spcPts val="1400"/>
-              </a:spcAft>
-            </a:pPr>
-            <a:r>
-              <a:rPr sz="2600" b="1" i="0">
-                <a:solidFill>
-                  <a:srgbClr val="2A2A2A"/>
-                </a:solidFill>
-                <a:latin typeface="Georgia"/>
-              </a:rPr>
-              <a:t>Nicht alle 6 jede Woche — der Monat entscheidet.</a:t>
-            </a:r>
-          </a:p>
-          <a:p>
-            <a:pPr algn="l">
-              <a:spcBef>
-                <a:spcPts val="0"/>
-              </a:spcBef>
-              <a:spcAft>
-                <a:spcPts val="1400"/>
-              </a:spcAft>
-            </a:pPr>
-            <a:r>
-              <a:rPr sz="2100" b="0" i="0">
-                <a:solidFill>
-                  <a:srgbClr val="2A2A2A"/>
+            <a:r>
+              <a:rPr sz="900" b="0" i="0">
+                <a:solidFill>
+                  <a:srgbClr val="7A8A95"/>
                 </a:solidFill>
                 <a:latin typeface="Calibri"/>
               </a:rPr>
-              <a:t>Aber: Me-Time + Reflexion möglichst nie ganz raus.</a:t>
-            </a:r>
-          </a:p>
-          <a:p>
-            <a:pPr algn="l">
-              <a:spcBef>
-                <a:spcPts val="0"/>
-              </a:spcBef>
-              <a:spcAft>
-                <a:spcPts val="1400"/>
-              </a:spcAft>
-            </a:pPr>
-            <a:r>
-              <a:rPr sz="2000" b="0" i="1">
-                <a:solidFill>
-                  <a:srgbClr val="6E6E6E"/>
+              <a:t>Mama-CEO · Säule 3 · Lektion 3.4</a:t>
+            </a:r>
+          </a:p>
+        </p:txBody>
+      </p:sp>
+      <p:sp>
+        <p:nvSpPr>
+          <p:cNvPr id="5" name="TextBox 4"/>
+          <p:cNvSpPr txBox="1"/>
+          <p:nvPr/>
+        </p:nvSpPr>
+        <p:spPr>
+          <a:xfrm>
+            <a:off x="6400800" y="4754880"/>
+            <a:ext cx="2286000" cy="274320"/>
+          </a:xfrm>
+          <a:prstGeom prst="rect">
+            <a:avLst/>
+          </a:prstGeom>
+          <a:noFill/>
+        </p:spPr>
+        <p:txBody>
+          <a:bodyPr wrap="square" anchor="t" lIns="0" rIns="0" tIns="0" bIns="0">
+            <a:spAutoFit/>
+          </a:bodyPr>
+          <a:lstStyle/>
+          <a:p>
+            <a:pPr algn="r"/>
+            <a:r>
+              <a:rPr sz="900" b="0" i="0">
+                <a:solidFill>
+                  <a:srgbClr val="7A8A95"/>
                 </a:solidFill>
                 <a:latin typeface="Calibri"/>
               </a:rPr>
-              <a:t>Sonst landest du wieder im Hamsterrad aus Säule 2.</a:t>
+              <a:t>Mum Life Balance</a:t>
             </a:r>
           </a:p>
         </p:txBody>
